--- a/CODA-Association/CODAwork2026/data_outputs/CodaWork2026_Presentation_2026-05-27.pptx
+++ b/CODA-Association/CODAwork2026/data_outputs/CodaWork2026_Presentation_2026-05-27.pptx
@@ -24,6 +24,8 @@
     <p:sldId id="272" r:id="rId23"/>
     <p:sldId id="273" r:id="rId24"/>
     <p:sldId id="274" r:id="rId25"/>
+    <p:sldId id="275" r:id="rId26"/>
+    <p:sldId id="276" r:id="rId27"/>
   </p:sldIdLst>
   <p:sldSz cx="10058400" cy="7772400" type="screen4x3"/>
   <p:notesSz cx="6858000" cy="9144000"/>
@@ -3564,7 +3566,7 @@
                 </a:solidFill>
                 <a:latin typeface="Calibri"/>
               </a:rPr>
-              <a:t>1 / 19</a:t>
+              <a:t>1 / 21</a:t>
             </a:r>
           </a:p>
         </p:txBody>
@@ -3625,7 +3627,7 @@
                 </a:solidFill>
                 <a:latin typeface="Calibri"/>
               </a:rPr>
-              <a:t>United Kingdom — share and structural work</a:t>
+              <a:t>Japan — share and structural work</a:t>
             </a:r>
           </a:p>
         </p:txBody>
@@ -3660,14 +3662,14 @@
                 </a:solidFill>
                 <a:latin typeface="Calibri"/>
               </a:rPr>
-              <a:t>Coal exit as policy-driven regime change, absorbed across several carriers.</a:t>
+              <a:t>Fukushima 2011: an external shock displaces nuclear; a multi-year reorganisation follows.</a:t>
             </a:r>
           </a:p>
         </p:txBody>
       </p:sp>
       <p:pic>
         <p:nvPicPr>
-          <p:cNvPr id="4" name="Picture 3" descr="fig4_uk.png"/>
+          <p:cNvPr id="4" name="Picture 3" descr="fig3_japan.png"/>
           <p:cNvPicPr>
             <a:picLocks noChangeAspect="1"/>
           </p:cNvPicPr>
@@ -3719,7 +3721,7 @@
                 </a:solidFill>
                 <a:latin typeface="Calibri"/>
               </a:rPr>
-              <a:t>Coal:  &gt; 30 %  →  &lt; 2 %.   Wind, solar, and other renewables absorb the displaced work.</a:t>
+              <a:t>Aitchison distance (distance on the simplex) 2011 → 2012 ≈ 3 × the baseline step  ·  17 Helmsman flips</a:t>
             </a:r>
           </a:p>
         </p:txBody>
@@ -3754,7 +3756,7 @@
                 </a:solidFill>
                 <a:latin typeface="Calibri"/>
               </a:rPr>
-              <a:t>Displaced work redistributes across several carriers — not one substitute, but several.</a:t>
+              <a:t>The instrument detects both the shock and the multi-year reorganisation that followed.</a:t>
             </a:r>
           </a:p>
         </p:txBody>
@@ -3789,7 +3791,7 @@
                 </a:solidFill>
                 <a:latin typeface="Calibri"/>
               </a:rPr>
-              <a:t>United Kingdom — share + structural work  ·  the trajectory is next</a:t>
+              <a:t>Japan — share + structural work  ·  the trajectory is next</a:t>
             </a:r>
           </a:p>
         </p:txBody>
@@ -3824,7 +3826,7 @@
                 </a:solidFill>
                 <a:latin typeface="Calibri"/>
               </a:rPr>
-              <a:t>10 / 19</a:t>
+              <a:t>10 / 21</a:t>
             </a:r>
           </a:p>
         </p:txBody>
@@ -3885,7 +3887,7 @@
                 </a:solidFill>
                 <a:latin typeface="Calibri"/>
               </a:rPr>
-              <a:t>United Kingdom — the trajectory</a:t>
+              <a:t>Japan — the trajectory</a:t>
             </a:r>
           </a:p>
         </p:txBody>
@@ -3920,14 +3922,14 @@
                 </a:solidFill>
                 <a:latin typeface="Calibri"/>
               </a:rPr>
-              <a:t>The Helmsman trajectory: a jump from the coal vertex, then a return toward stability.</a:t>
+              <a:t>The Helmsman trajectory: looping reorganisation, not a single step.</a:t>
             </a:r>
           </a:p>
         </p:txBody>
       </p:sp>
       <p:pic>
         <p:nvPicPr>
-          <p:cNvPr id="4" name="Picture 3" descr="fig6_nav_gbr.png"/>
+          <p:cNvPr id="4" name="Picture 3" descr="fig6_nav_jpn.png"/>
           <p:cNvPicPr>
             <a:picLocks noChangeAspect="1"/>
           </p:cNvPicPr>
@@ -3979,7 +3981,7 @@
                 </a:solidFill>
                 <a:latin typeface="Calibri"/>
               </a:rPr>
-              <a:t>Trajectory directness 0.36 — the jump-and-return pattern.</a:t>
+              <a:t>Trajectory directness 0.09 — the loop-and-reorganise pattern.</a:t>
             </a:r>
           </a:p>
         </p:txBody>
@@ -4014,7 +4016,7 @@
                 </a:solidFill>
                 <a:latin typeface="Calibri"/>
               </a:rPr>
-              <a:t>A sharp departure from the coal vertex, then re-stabilisation — regime change as one decisive displacement.</a:t>
+              <a:t>The trajectory revisits and reroutes — the system searches for a new composition, not a planned trajectory.</a:t>
             </a:r>
           </a:p>
         </p:txBody>
@@ -4049,7 +4051,7 @@
                 </a:solidFill>
                 <a:latin typeface="Calibri"/>
               </a:rPr>
-              <a:t>United Kingdom — the trajectory</a:t>
+              <a:t>Japan — the trajectory</a:t>
             </a:r>
           </a:p>
         </p:txBody>
@@ -4084,7 +4086,7 @@
                 </a:solidFill>
                 <a:latin typeface="Calibri"/>
               </a:rPr>
-              <a:t>11 / 19</a:t>
+              <a:t>11 / 21</a:t>
             </a:r>
           </a:p>
         </p:txBody>
@@ -4145,7 +4147,7 @@
                 </a:solidFill>
                 <a:latin typeface="Calibri"/>
               </a:rPr>
-              <a:t>Across the corpus — deceptive drift in 5 of 9</a:t>
+              <a:t>United Kingdom — share and structural work</a:t>
             </a:r>
           </a:p>
         </p:txBody>
@@ -4180,84 +4182,14 @@
                 </a:solidFill>
                 <a:latin typeface="Calibri"/>
               </a:rPr>
-              <a:t>The same protocol applied to all nine EMBER countries.</a:t>
-            </a:r>
-          </a:p>
-        </p:txBody>
-      </p:sp>
-      <p:sp>
-        <p:nvSpPr>
-          <p:cNvPr id="4" name="TextBox 3"/>
-          <p:cNvSpPr txBox="1"/>
-          <p:nvPr/>
-        </p:nvSpPr>
-        <p:spPr>
-          <a:xfrm>
-            <a:off x="640080" y="1426464"/>
-            <a:ext cx="8778240" cy="502920"/>
-          </a:xfrm>
-          <a:prstGeom prst="rect">
-            <a:avLst/>
-          </a:prstGeom>
-          <a:noFill/>
-        </p:spPr>
-        <p:txBody>
-          <a:bodyPr wrap="square" lIns="60000" rIns="60000" tIns="30000" bIns="30000">
-            <a:spAutoFit/>
-          </a:bodyPr>
-          <a:lstStyle/>
-          <a:p>
-            <a:pPr algn="ctr"/>
-            <a:r>
-              <a:rPr sz="1500" b="1" i="0">
-                <a:solidFill>
-                  <a:srgbClr val="000000"/>
-                </a:solidFill>
-                <a:latin typeface="Calibri"/>
-              </a:rPr>
-              <a:t>Deceptive drift: the size (share) view hides which carrier did the structural work — a small carrier carries a large share of the squared compositional motion (Activation Coefficient ≫ 1).</a:t>
-            </a:r>
-          </a:p>
-        </p:txBody>
-      </p:sp>
-      <p:sp>
-        <p:nvSpPr>
-          <p:cNvPr id="5" name="TextBox 4"/>
-          <p:cNvSpPr txBox="1"/>
-          <p:nvPr/>
-        </p:nvSpPr>
-        <p:spPr>
-          <a:xfrm>
-            <a:off x="640080" y="1975104"/>
-            <a:ext cx="8778240" cy="411480"/>
-          </a:xfrm>
-          <a:prstGeom prst="rect">
-            <a:avLst/>
-          </a:prstGeom>
-          <a:noFill/>
-        </p:spPr>
-        <p:txBody>
-          <a:bodyPr wrap="square" lIns="60000" rIns="60000" tIns="30000" bIns="30000">
-            <a:spAutoFit/>
-          </a:bodyPr>
-          <a:lstStyle/>
-          <a:p>
-            <a:pPr algn="ctr"/>
-            <a:r>
-              <a:rPr sz="1400" b="0" i="1">
-                <a:solidFill>
-                  <a:srgbClr val="333333"/>
-                </a:solidFill>
-                <a:latin typeface="Calibri"/>
-              </a:rPr>
-              <a:t>Detected in five of nine countries; absent in four — a detector that reads real structure must not flag every system.</a:t>
+              <a:t>Coal exit as policy-driven regime change, absorbed across several carriers.</a:t>
             </a:r>
           </a:p>
         </p:txBody>
       </p:sp>
       <p:pic>
         <p:nvPicPr>
-          <p:cNvPr id="6" name="Picture 5" descr="fig5_crosscountry.png"/>
+          <p:cNvPr id="4" name="Picture 3" descr="fig4_uk.png"/>
           <p:cNvPicPr>
             <a:picLocks noChangeAspect="1"/>
           </p:cNvPicPr>
@@ -4271,8 +4203,8 @@
         </p:blipFill>
         <p:spPr>
           <a:xfrm>
-            <a:off x="2423160" y="2432304"/>
-            <a:ext cx="5212080" cy="3822191"/>
+            <a:off x="640080" y="1371600"/>
+            <a:ext cx="8778240" cy="4727448"/>
           </a:xfrm>
           <a:prstGeom prst="rect">
             <a:avLst/>
@@ -4281,35 +4213,105 @@
       </p:pic>
       <p:sp>
         <p:nvSpPr>
+          <p:cNvPr id="5" name="TextBox 4"/>
+          <p:cNvSpPr txBox="1"/>
+          <p:nvPr/>
+        </p:nvSpPr>
+        <p:spPr>
+          <a:xfrm>
+            <a:off x="457200" y="6144768"/>
+            <a:ext cx="9144000" cy="365760"/>
+          </a:xfrm>
+          <a:prstGeom prst="rect">
+            <a:avLst/>
+          </a:prstGeom>
+          <a:noFill/>
+        </p:spPr>
+        <p:txBody>
+          <a:bodyPr wrap="square" lIns="60000" rIns="60000" tIns="30000" bIns="30000">
+            <a:spAutoFit/>
+          </a:bodyPr>
+          <a:lstStyle/>
+          <a:p>
+            <a:pPr algn="ctr"/>
+            <a:r>
+              <a:rPr sz="1600" b="1" i="0">
+                <a:solidFill>
+                  <a:srgbClr val="000000"/>
+                </a:solidFill>
+                <a:latin typeface="Calibri"/>
+              </a:rPr>
+              <a:t>Coal:  &gt; 30 %  →  &lt; 2 %.   Wind, solar, and other renewables absorb the displaced work.</a:t>
+            </a:r>
+          </a:p>
+        </p:txBody>
+      </p:sp>
+      <p:sp>
+        <p:nvSpPr>
+          <p:cNvPr id="6" name="TextBox 5"/>
+          <p:cNvSpPr txBox="1"/>
+          <p:nvPr/>
+        </p:nvSpPr>
+        <p:spPr>
+          <a:xfrm>
+            <a:off x="457200" y="6565392"/>
+            <a:ext cx="9144000" cy="365760"/>
+          </a:xfrm>
+          <a:prstGeom prst="rect">
+            <a:avLst/>
+          </a:prstGeom>
+          <a:noFill/>
+        </p:spPr>
+        <p:txBody>
+          <a:bodyPr wrap="square" lIns="60000" rIns="60000" tIns="30000" bIns="30000">
+            <a:spAutoFit/>
+          </a:bodyPr>
+          <a:lstStyle/>
+          <a:p>
+            <a:pPr algn="ctr"/>
+            <a:r>
+              <a:rPr sz="1400" b="0" i="1">
+                <a:solidFill>
+                  <a:srgbClr val="707070"/>
+                </a:solidFill>
+                <a:latin typeface="Calibri"/>
+              </a:rPr>
+              <a:t>Displaced work redistributes across several carriers — not one substitute, but several.</a:t>
+            </a:r>
+          </a:p>
+        </p:txBody>
+      </p:sp>
+      <p:sp>
+        <p:nvSpPr>
           <p:cNvPr id="7" name="TextBox 6"/>
           <p:cNvSpPr txBox="1"/>
           <p:nvPr/>
         </p:nvSpPr>
         <p:spPr>
           <a:xfrm>
-            <a:off x="457200" y="6309360"/>
-            <a:ext cx="9144000" cy="384048"/>
-          </a:xfrm>
-          <a:prstGeom prst="rect">
-            <a:avLst/>
-          </a:prstGeom>
-          <a:noFill/>
-        </p:spPr>
-        <p:txBody>
-          <a:bodyPr wrap="square" lIns="60000" rIns="60000" tIns="30000" bIns="30000">
-            <a:spAutoFit/>
-          </a:bodyPr>
-          <a:lstStyle/>
-          <a:p>
-            <a:pPr algn="ctr"/>
-            <a:r>
-              <a:rPr sz="1600" b="1" i="0">
-                <a:solidFill>
-                  <a:srgbClr val="000000"/>
-                </a:solidFill>
-                <a:latin typeface="Calibri"/>
-              </a:rPr>
-              <a:t>deceptive drift present:   AUS · CHN · GBR · IND · JPN</a:t>
+            <a:off x="457200" y="7360920"/>
+            <a:ext cx="7315200" cy="310896"/>
+          </a:xfrm>
+          <a:prstGeom prst="rect">
+            <a:avLst/>
+          </a:prstGeom>
+          <a:noFill/>
+        </p:spPr>
+        <p:txBody>
+          <a:bodyPr wrap="square" lIns="60000" rIns="60000" tIns="30000" bIns="30000">
+            <a:spAutoFit/>
+          </a:bodyPr>
+          <a:lstStyle/>
+          <a:p>
+            <a:pPr algn="l"/>
+            <a:r>
+              <a:rPr sz="1300" b="0" i="1">
+                <a:solidFill>
+                  <a:srgbClr val="707070"/>
+                </a:solidFill>
+                <a:latin typeface="Calibri"/>
+              </a:rPr>
+              <a:t>United Kingdom — share + structural work  ·  the trajectory is next</a:t>
             </a:r>
           </a:p>
         </p:txBody>
@@ -4317,76 +4319,6 @@
       <p:sp>
         <p:nvSpPr>
           <p:cNvPr id="8" name="TextBox 7"/>
-          <p:cNvSpPr txBox="1"/>
-          <p:nvPr/>
-        </p:nvSpPr>
-        <p:spPr>
-          <a:xfrm>
-            <a:off x="457200" y="6693408"/>
-            <a:ext cx="9144000" cy="365760"/>
-          </a:xfrm>
-          <a:prstGeom prst="rect">
-            <a:avLst/>
-          </a:prstGeom>
-          <a:noFill/>
-        </p:spPr>
-        <p:txBody>
-          <a:bodyPr wrap="square" lIns="60000" rIns="60000" tIns="30000" bIns="30000">
-            <a:spAutoFit/>
-          </a:bodyPr>
-          <a:lstStyle/>
-          <a:p>
-            <a:pPr algn="ctr"/>
-            <a:r>
-              <a:rPr sz="1500" b="0" i="0">
-                <a:solidFill>
-                  <a:srgbClr val="555555"/>
-                </a:solidFill>
-                <a:latin typeface="Calibri"/>
-              </a:rPr>
-              <a:t>deceptive drift absent:   DEU (annual) · FRA · USA · WLD</a:t>
-            </a:r>
-          </a:p>
-        </p:txBody>
-      </p:sp>
-      <p:sp>
-        <p:nvSpPr>
-          <p:cNvPr id="9" name="TextBox 8"/>
-          <p:cNvSpPr txBox="1"/>
-          <p:nvPr/>
-        </p:nvSpPr>
-        <p:spPr>
-          <a:xfrm>
-            <a:off x="457200" y="7040880"/>
-            <a:ext cx="9144000" cy="365760"/>
-          </a:xfrm>
-          <a:prstGeom prst="rect">
-            <a:avLst/>
-          </a:prstGeom>
-          <a:noFill/>
-        </p:spPr>
-        <p:txBody>
-          <a:bodyPr wrap="square" lIns="60000" rIns="60000" tIns="30000" bIns="30000">
-            <a:spAutoFit/>
-          </a:bodyPr>
-          <a:lstStyle/>
-          <a:p>
-            <a:pPr algn="ctr"/>
-            <a:r>
-              <a:rPr sz="1400" b="0" i="1">
-                <a:solidFill>
-                  <a:srgbClr val="333333"/>
-                </a:solidFill>
-                <a:latin typeface="Calibri"/>
-              </a:rPr>
-              <a:t>Discrimination — flagging some systems and not others — is itself evidence the detector reads real structure.</a:t>
-            </a:r>
-          </a:p>
-        </p:txBody>
-      </p:sp>
-      <p:sp>
-        <p:nvSpPr>
-          <p:cNvPr id="10" name="TextBox 9"/>
           <p:cNvSpPr txBox="1"/>
           <p:nvPr/>
         </p:nvSpPr>
@@ -4414,7 +4346,7 @@
                 </a:solidFill>
                 <a:latin typeface="Calibri"/>
               </a:rPr>
-              <a:t>12 / 19</a:t>
+              <a:t>12 / 21</a:t>
             </a:r>
           </a:p>
         </p:txBody>
@@ -4453,8 +4385,8 @@
         </p:nvSpPr>
         <p:spPr>
           <a:xfrm>
-            <a:off x="457200" y="274320"/>
-            <a:ext cx="9144000" cy="566928"/>
+            <a:off x="457200" y="292608"/>
+            <a:ext cx="9144000" cy="713232"/>
           </a:xfrm>
           <a:prstGeom prst="rect">
             <a:avLst/>
@@ -4469,13 +4401,13 @@
           <a:p>
             <a:pPr algn="ctr"/>
             <a:r>
-              <a:rPr sz="2600" b="1" i="0">
+              <a:rPr sz="3000" b="1" i="0">
                 <a:solidFill>
                   <a:srgbClr val="111111"/>
                 </a:solidFill>
                 <a:latin typeface="Calibri"/>
               </a:rPr>
-              <a:t>Australia — the trajectory</a:t>
+              <a:t>United Kingdom — the trajectory</a:t>
             </a:r>
           </a:p>
         </p:txBody>
@@ -4488,8 +4420,8 @@
         </p:nvSpPr>
         <p:spPr>
           <a:xfrm>
-            <a:off x="457200" y="950976"/>
-            <a:ext cx="9144000" cy="365760"/>
+            <a:off x="457200" y="1024128"/>
+            <a:ext cx="9144000" cy="384048"/>
           </a:xfrm>
           <a:prstGeom prst="rect">
             <a:avLst/>
@@ -4504,20 +4436,20 @@
           <a:p>
             <a:pPr algn="ctr"/>
             <a:r>
-              <a:rPr sz="1500" b="1" i="1">
-                <a:solidFill>
-                  <a:srgbClr val="333333"/>
-                </a:solidFill>
-                <a:latin typeface="Calibri"/>
-              </a:rPr>
-              <a:t>The rest of the world · deceptive drift present.  Australia: the full 2000–2025 trajectory.</a:t>
+              <a:rPr sz="1500" b="0" i="1">
+                <a:solidFill>
+                  <a:srgbClr val="555555"/>
+                </a:solidFill>
+                <a:latin typeface="Calibri"/>
+              </a:rPr>
+              <a:t>The Helmsman trajectory: a jump from the coal vertex, then a return toward stability.</a:t>
             </a:r>
           </a:p>
         </p:txBody>
       </p:sp>
       <p:pic>
         <p:nvPicPr>
-          <p:cNvPr id="4" name="Picture 3" descr="image3.png"/>
+          <p:cNvPr id="4" name="Picture 3" descr="fig6_nav_gbr.png"/>
           <p:cNvPicPr>
             <a:picLocks noChangeAspect="1"/>
           </p:cNvPicPr>
@@ -4531,8 +4463,8 @@
         </p:blipFill>
         <p:spPr>
           <a:xfrm>
-            <a:off x="1143000" y="1417320"/>
-            <a:ext cx="7772400" cy="4855464"/>
+            <a:off x="1828800" y="1325880"/>
+            <a:ext cx="6400800" cy="4946904"/>
           </a:xfrm>
           <a:prstGeom prst="rect">
             <a:avLst/>
@@ -4542,6 +4474,76 @@
       <p:sp>
         <p:nvSpPr>
           <p:cNvPr id="5" name="TextBox 4"/>
+          <p:cNvSpPr txBox="1"/>
+          <p:nvPr/>
+        </p:nvSpPr>
+        <p:spPr>
+          <a:xfrm>
+            <a:off x="457200" y="6327648"/>
+            <a:ext cx="9144000" cy="365760"/>
+          </a:xfrm>
+          <a:prstGeom prst="rect">
+            <a:avLst/>
+          </a:prstGeom>
+          <a:noFill/>
+        </p:spPr>
+        <p:txBody>
+          <a:bodyPr wrap="square" lIns="60000" rIns="60000" tIns="30000" bIns="30000">
+            <a:spAutoFit/>
+          </a:bodyPr>
+          <a:lstStyle/>
+          <a:p>
+            <a:pPr algn="ctr"/>
+            <a:r>
+              <a:rPr sz="1700" b="1" i="0">
+                <a:solidFill>
+                  <a:srgbClr val="000000"/>
+                </a:solidFill>
+                <a:latin typeface="Calibri"/>
+              </a:rPr>
+              <a:t>Trajectory directness 0.36 — the jump-and-return pattern.</a:t>
+            </a:r>
+          </a:p>
+        </p:txBody>
+      </p:sp>
+      <p:sp>
+        <p:nvSpPr>
+          <p:cNvPr id="6" name="TextBox 5"/>
+          <p:cNvSpPr txBox="1"/>
+          <p:nvPr/>
+        </p:nvSpPr>
+        <p:spPr>
+          <a:xfrm>
+            <a:off x="457200" y="6748272"/>
+            <a:ext cx="9144000" cy="365760"/>
+          </a:xfrm>
+          <a:prstGeom prst="rect">
+            <a:avLst/>
+          </a:prstGeom>
+          <a:noFill/>
+        </p:spPr>
+        <p:txBody>
+          <a:bodyPr wrap="square" lIns="60000" rIns="60000" tIns="30000" bIns="30000">
+            <a:spAutoFit/>
+          </a:bodyPr>
+          <a:lstStyle/>
+          <a:p>
+            <a:pPr algn="ctr"/>
+            <a:r>
+              <a:rPr sz="1400" b="0" i="1">
+                <a:solidFill>
+                  <a:srgbClr val="707070"/>
+                </a:solidFill>
+                <a:latin typeface="Calibri"/>
+              </a:rPr>
+              <a:t>A sharp departure from the coal vertex, then re-stabilisation — regime change as one decisive displacement.</a:t>
+            </a:r>
+          </a:p>
+        </p:txBody>
+      </p:sp>
+      <p:sp>
+        <p:nvSpPr>
+          <p:cNvPr id="7" name="TextBox 6"/>
           <p:cNvSpPr txBox="1"/>
           <p:nvPr/>
         </p:nvSpPr>
@@ -4569,14 +4571,14 @@
                 </a:solidFill>
                 <a:latin typeface="Calibri"/>
               </a:rPr>
-              <a:t>rest of the world · deceptive drift present (1 of 3)</a:t>
-            </a:r>
-          </a:p>
-        </p:txBody>
-      </p:sp>
-      <p:sp>
-        <p:nvSpPr>
-          <p:cNvPr id="6" name="TextBox 5"/>
+              <a:t>United Kingdom — the trajectory</a:t>
+            </a:r>
+          </a:p>
+        </p:txBody>
+      </p:sp>
+      <p:sp>
+        <p:nvSpPr>
+          <p:cNvPr id="8" name="TextBox 7"/>
           <p:cNvSpPr txBox="1"/>
           <p:nvPr/>
         </p:nvSpPr>
@@ -4604,7 +4606,7 @@
                 </a:solidFill>
                 <a:latin typeface="Calibri"/>
               </a:rPr>
-              <a:t>13 / 19</a:t>
+              <a:t>13 / 21</a:t>
             </a:r>
           </a:p>
         </p:txBody>
@@ -4643,8 +4645,8 @@
         </p:nvSpPr>
         <p:spPr>
           <a:xfrm>
-            <a:off x="457200" y="274320"/>
-            <a:ext cx="9144000" cy="566928"/>
+            <a:off x="457200" y="292608"/>
+            <a:ext cx="9144000" cy="713232"/>
           </a:xfrm>
           <a:prstGeom prst="rect">
             <a:avLst/>
@@ -4659,13 +4661,13 @@
           <a:p>
             <a:pPr algn="ctr"/>
             <a:r>
-              <a:rPr sz="2600" b="1" i="0">
+              <a:rPr sz="3000" b="1" i="0">
                 <a:solidFill>
                   <a:srgbClr val="111111"/>
                 </a:solidFill>
                 <a:latin typeface="Calibri"/>
               </a:rPr>
-              <a:t>China — the trajectory</a:t>
+              <a:t>Across the corpus — deceptive drift in 5 of 9</a:t>
             </a:r>
           </a:p>
         </p:txBody>
@@ -4678,8 +4680,8 @@
         </p:nvSpPr>
         <p:spPr>
           <a:xfrm>
-            <a:off x="457200" y="950976"/>
-            <a:ext cx="9144000" cy="365760"/>
+            <a:off x="457200" y="1024128"/>
+            <a:ext cx="9144000" cy="384048"/>
           </a:xfrm>
           <a:prstGeom prst="rect">
             <a:avLst/>
@@ -4694,20 +4696,90 @@
           <a:p>
             <a:pPr algn="ctr"/>
             <a:r>
-              <a:rPr sz="1500" b="1" i="1">
+              <a:rPr sz="1500" b="0" i="1">
+                <a:solidFill>
+                  <a:srgbClr val="555555"/>
+                </a:solidFill>
+                <a:latin typeface="Calibri"/>
+              </a:rPr>
+              <a:t>The same protocol applied to all nine EMBER countries.</a:t>
+            </a:r>
+          </a:p>
+        </p:txBody>
+      </p:sp>
+      <p:sp>
+        <p:nvSpPr>
+          <p:cNvPr id="4" name="TextBox 3"/>
+          <p:cNvSpPr txBox="1"/>
+          <p:nvPr/>
+        </p:nvSpPr>
+        <p:spPr>
+          <a:xfrm>
+            <a:off x="640080" y="1426464"/>
+            <a:ext cx="8778240" cy="502920"/>
+          </a:xfrm>
+          <a:prstGeom prst="rect">
+            <a:avLst/>
+          </a:prstGeom>
+          <a:noFill/>
+        </p:spPr>
+        <p:txBody>
+          <a:bodyPr wrap="square" lIns="60000" rIns="60000" tIns="30000" bIns="30000">
+            <a:spAutoFit/>
+          </a:bodyPr>
+          <a:lstStyle/>
+          <a:p>
+            <a:pPr algn="ctr"/>
+            <a:r>
+              <a:rPr sz="1500" b="1" i="0">
+                <a:solidFill>
+                  <a:srgbClr val="000000"/>
+                </a:solidFill>
+                <a:latin typeface="Calibri"/>
+              </a:rPr>
+              <a:t>Deceptive drift: the size (share) view hides which carrier did the structural work — a small carrier carries a large share of the squared compositional motion (Activation Coefficient ≫ 1).</a:t>
+            </a:r>
+          </a:p>
+        </p:txBody>
+      </p:sp>
+      <p:sp>
+        <p:nvSpPr>
+          <p:cNvPr id="5" name="TextBox 4"/>
+          <p:cNvSpPr txBox="1"/>
+          <p:nvPr/>
+        </p:nvSpPr>
+        <p:spPr>
+          <a:xfrm>
+            <a:off x="640080" y="1975104"/>
+            <a:ext cx="8778240" cy="411480"/>
+          </a:xfrm>
+          <a:prstGeom prst="rect">
+            <a:avLst/>
+          </a:prstGeom>
+          <a:noFill/>
+        </p:spPr>
+        <p:txBody>
+          <a:bodyPr wrap="square" lIns="60000" rIns="60000" tIns="30000" bIns="30000">
+            <a:spAutoFit/>
+          </a:bodyPr>
+          <a:lstStyle/>
+          <a:p>
+            <a:pPr algn="ctr"/>
+            <a:r>
+              <a:rPr sz="1400" b="0" i="1">
                 <a:solidFill>
                   <a:srgbClr val="333333"/>
                 </a:solidFill>
                 <a:latin typeface="Calibri"/>
               </a:rPr>
-              <a:t>China: the full trajectory — coal-era growth, then a turn.</a:t>
+              <a:t>Detected in five of nine countries; absent in four — a detector that reads real structure must not flag every system.</a:t>
             </a:r>
           </a:p>
         </p:txBody>
       </p:sp>
       <p:pic>
         <p:nvPicPr>
-          <p:cNvPr id="4" name="Picture 3" descr="image9.png"/>
+          <p:cNvPr id="6" name="Picture 5" descr="fig5_crosscountry.png"/>
           <p:cNvPicPr>
             <a:picLocks noChangeAspect="1"/>
           </p:cNvPicPr>
@@ -4721,8 +4793,8 @@
         </p:blipFill>
         <p:spPr>
           <a:xfrm>
-            <a:off x="1143000" y="1417320"/>
-            <a:ext cx="7772400" cy="4855464"/>
+            <a:off x="2423160" y="2432304"/>
+            <a:ext cx="5212080" cy="3822191"/>
           </a:xfrm>
           <a:prstGeom prst="rect">
             <a:avLst/>
@@ -4731,42 +4803,112 @@
       </p:pic>
       <p:sp>
         <p:nvSpPr>
-          <p:cNvPr id="5" name="TextBox 4"/>
-          <p:cNvSpPr txBox="1"/>
-          <p:nvPr/>
-        </p:nvSpPr>
-        <p:spPr>
-          <a:xfrm>
-            <a:off x="457200" y="7360920"/>
-            <a:ext cx="7315200" cy="310896"/>
-          </a:xfrm>
-          <a:prstGeom prst="rect">
-            <a:avLst/>
-          </a:prstGeom>
-          <a:noFill/>
-        </p:spPr>
-        <p:txBody>
-          <a:bodyPr wrap="square" lIns="60000" rIns="60000" tIns="30000" bIns="30000">
-            <a:spAutoFit/>
-          </a:bodyPr>
-          <a:lstStyle/>
-          <a:p>
-            <a:pPr algn="l"/>
-            <a:r>
-              <a:rPr sz="1300" b="0" i="1">
-                <a:solidFill>
-                  <a:srgbClr val="707070"/>
-                </a:solidFill>
-                <a:latin typeface="Calibri"/>
-              </a:rPr>
-              <a:t>rest of the world · deceptive drift present (2 of 3)</a:t>
-            </a:r>
-          </a:p>
-        </p:txBody>
-      </p:sp>
-      <p:sp>
-        <p:nvSpPr>
-          <p:cNvPr id="6" name="TextBox 5"/>
+          <p:cNvPr id="7" name="TextBox 6"/>
+          <p:cNvSpPr txBox="1"/>
+          <p:nvPr/>
+        </p:nvSpPr>
+        <p:spPr>
+          <a:xfrm>
+            <a:off x="457200" y="6309360"/>
+            <a:ext cx="9144000" cy="384048"/>
+          </a:xfrm>
+          <a:prstGeom prst="rect">
+            <a:avLst/>
+          </a:prstGeom>
+          <a:noFill/>
+        </p:spPr>
+        <p:txBody>
+          <a:bodyPr wrap="square" lIns="60000" rIns="60000" tIns="30000" bIns="30000">
+            <a:spAutoFit/>
+          </a:bodyPr>
+          <a:lstStyle/>
+          <a:p>
+            <a:pPr algn="ctr"/>
+            <a:r>
+              <a:rPr sz="1600" b="1" i="0">
+                <a:solidFill>
+                  <a:srgbClr val="000000"/>
+                </a:solidFill>
+                <a:latin typeface="Calibri"/>
+              </a:rPr>
+              <a:t>deceptive drift present:   AUS · CHN · GBR · IND · JPN</a:t>
+            </a:r>
+          </a:p>
+        </p:txBody>
+      </p:sp>
+      <p:sp>
+        <p:nvSpPr>
+          <p:cNvPr id="8" name="TextBox 7"/>
+          <p:cNvSpPr txBox="1"/>
+          <p:nvPr/>
+        </p:nvSpPr>
+        <p:spPr>
+          <a:xfrm>
+            <a:off x="457200" y="6693408"/>
+            <a:ext cx="9144000" cy="365760"/>
+          </a:xfrm>
+          <a:prstGeom prst="rect">
+            <a:avLst/>
+          </a:prstGeom>
+          <a:noFill/>
+        </p:spPr>
+        <p:txBody>
+          <a:bodyPr wrap="square" lIns="60000" rIns="60000" tIns="30000" bIns="30000">
+            <a:spAutoFit/>
+          </a:bodyPr>
+          <a:lstStyle/>
+          <a:p>
+            <a:pPr algn="ctr"/>
+            <a:r>
+              <a:rPr sz="1500" b="0" i="0">
+                <a:solidFill>
+                  <a:srgbClr val="555555"/>
+                </a:solidFill>
+                <a:latin typeface="Calibri"/>
+              </a:rPr>
+              <a:t>deceptive drift absent:   DEU (annual) · FRA · USA · WLD</a:t>
+            </a:r>
+          </a:p>
+        </p:txBody>
+      </p:sp>
+      <p:sp>
+        <p:nvSpPr>
+          <p:cNvPr id="9" name="TextBox 8"/>
+          <p:cNvSpPr txBox="1"/>
+          <p:nvPr/>
+        </p:nvSpPr>
+        <p:spPr>
+          <a:xfrm>
+            <a:off x="457200" y="7040880"/>
+            <a:ext cx="9144000" cy="365760"/>
+          </a:xfrm>
+          <a:prstGeom prst="rect">
+            <a:avLst/>
+          </a:prstGeom>
+          <a:noFill/>
+        </p:spPr>
+        <p:txBody>
+          <a:bodyPr wrap="square" lIns="60000" rIns="60000" tIns="30000" bIns="30000">
+            <a:spAutoFit/>
+          </a:bodyPr>
+          <a:lstStyle/>
+          <a:p>
+            <a:pPr algn="ctr"/>
+            <a:r>
+              <a:rPr sz="1400" b="0" i="1">
+                <a:solidFill>
+                  <a:srgbClr val="333333"/>
+                </a:solidFill>
+                <a:latin typeface="Calibri"/>
+              </a:rPr>
+              <a:t>Discrimination — flagging some systems and not others — is itself evidence the detector reads real structure.</a:t>
+            </a:r>
+          </a:p>
+        </p:txBody>
+      </p:sp>
+      <p:sp>
+        <p:nvSpPr>
+          <p:cNvPr id="10" name="TextBox 9"/>
           <p:cNvSpPr txBox="1"/>
           <p:nvPr/>
         </p:nvSpPr>
@@ -4794,7 +4936,7 @@
                 </a:solidFill>
                 <a:latin typeface="Calibri"/>
               </a:rPr>
-              <a:t>14 / 19</a:t>
+              <a:t>14 / 21</a:t>
             </a:r>
           </a:p>
         </p:txBody>
@@ -4855,7 +4997,7 @@
                 </a:solidFill>
                 <a:latin typeface="Calibri"/>
               </a:rPr>
-              <a:t>India — the trajectory</a:t>
+              <a:t>Australia — the trajectory</a:t>
             </a:r>
           </a:p>
         </p:txBody>
@@ -4890,14 +5032,14 @@
                 </a:solidFill>
                 <a:latin typeface="Calibri"/>
               </a:rPr>
-              <a:t>India: the full trajectory — the third case where deceptive drift is present.</a:t>
+              <a:t>The rest of the world · deceptive drift present.  Australia: the full 2000–2025 trajectory.</a:t>
             </a:r>
           </a:p>
         </p:txBody>
       </p:sp>
       <p:pic>
         <p:nvPicPr>
-          <p:cNvPr id="4" name="Picture 3" descr="image33.png"/>
+          <p:cNvPr id="4" name="Picture 3" descr="image3.png"/>
           <p:cNvPicPr>
             <a:picLocks noChangeAspect="1"/>
           </p:cNvPicPr>
@@ -4949,7 +5091,7 @@
                 </a:solidFill>
                 <a:latin typeface="Calibri"/>
               </a:rPr>
-              <a:t>rest of the world · deceptive drift present (3 of 3)</a:t>
+              <a:t>rest of the world · deceptive drift present (1 of 3)</a:t>
             </a:r>
           </a:p>
         </p:txBody>
@@ -4984,7 +5126,7 @@
                 </a:solidFill>
                 <a:latin typeface="Calibri"/>
               </a:rPr>
-              <a:t>15 / 19</a:t>
+              <a:t>15 / 21</a:t>
             </a:r>
           </a:p>
         </p:txBody>
@@ -5045,7 +5187,7 @@
                 </a:solidFill>
                 <a:latin typeface="Calibri"/>
               </a:rPr>
-              <a:t>France — the trajectory</a:t>
+              <a:t>China — the trajectory</a:t>
             </a:r>
           </a:p>
         </p:txBody>
@@ -5080,14 +5222,14 @@
                 </a:solidFill>
                 <a:latin typeface="Calibri"/>
               </a:rPr>
-              <a:t>Deceptive drift absent.  France: the full trajectory — nuclear-stable.</a:t>
+              <a:t>China: the full trajectory — coal-era growth, then a turn.</a:t>
             </a:r>
           </a:p>
         </p:txBody>
       </p:sp>
       <p:pic>
         <p:nvPicPr>
-          <p:cNvPr id="4" name="Picture 3" descr="image21.png"/>
+          <p:cNvPr id="4" name="Picture 3" descr="image9.png"/>
           <p:cNvPicPr>
             <a:picLocks noChangeAspect="1"/>
           </p:cNvPicPr>
@@ -5139,7 +5281,7 @@
                 </a:solidFill>
                 <a:latin typeface="Calibri"/>
               </a:rPr>
-              <a:t>rest of the world · deceptive drift absent (1 of 3)</a:t>
+              <a:t>rest of the world · deceptive drift present (2 of 3)</a:t>
             </a:r>
           </a:p>
         </p:txBody>
@@ -5174,7 +5316,7 @@
                 </a:solidFill>
                 <a:latin typeface="Calibri"/>
               </a:rPr>
-              <a:t>16 / 19</a:t>
+              <a:t>16 / 21</a:t>
             </a:r>
           </a:p>
         </p:txBody>
@@ -5235,7 +5377,7 @@
                 </a:solidFill>
                 <a:latin typeface="Calibri"/>
               </a:rPr>
-              <a:t>United States — the trajectory</a:t>
+              <a:t>India — the trajectory</a:t>
             </a:r>
           </a:p>
         </p:txBody>
@@ -5270,14 +5412,14 @@
                 </a:solidFill>
                 <a:latin typeface="Calibri"/>
               </a:rPr>
-              <a:t>United States: the full trajectory — a large grid; no deceptive drift at annual grain.</a:t>
+              <a:t>India: the full trajectory — the third case where deceptive drift is present.</a:t>
             </a:r>
           </a:p>
         </p:txBody>
       </p:sp>
       <p:pic>
         <p:nvPicPr>
-          <p:cNvPr id="4" name="Picture 3" descr="image45.png"/>
+          <p:cNvPr id="4" name="Picture 3" descr="image33.png"/>
           <p:cNvPicPr>
             <a:picLocks noChangeAspect="1"/>
           </p:cNvPicPr>
@@ -5329,7 +5471,7 @@
                 </a:solidFill>
                 <a:latin typeface="Calibri"/>
               </a:rPr>
-              <a:t>rest of the world · deceptive drift absent (2 of 3)</a:t>
+              <a:t>rest of the world · deceptive drift present (3 of 3)</a:t>
             </a:r>
           </a:p>
         </p:txBody>
@@ -5364,7 +5506,7 @@
                 </a:solidFill>
                 <a:latin typeface="Calibri"/>
               </a:rPr>
-              <a:t>17 / 19</a:t>
+              <a:t>17 / 21</a:t>
             </a:r>
           </a:p>
         </p:txBody>
@@ -5425,7 +5567,7 @@
                 </a:solidFill>
                 <a:latin typeface="Calibri"/>
               </a:rPr>
-              <a:t>World — the trajectory</a:t>
+              <a:t>France — the trajectory</a:t>
             </a:r>
           </a:p>
         </p:txBody>
@@ -5460,14 +5602,14 @@
                 </a:solidFill>
                 <a:latin typeface="Calibri"/>
               </a:rPr>
-              <a:t>World: the aggregate trajectory — large-N smoothing hides the deceptive drift in its constituents.</a:t>
+              <a:t>Deceptive drift absent.  France: the full trajectory — nuclear-stable.</a:t>
             </a:r>
           </a:p>
         </p:txBody>
       </p:sp>
       <p:pic>
         <p:nvPicPr>
-          <p:cNvPr id="4" name="Picture 3" descr="image51.png"/>
+          <p:cNvPr id="4" name="Picture 3" descr="image21.png"/>
           <p:cNvPicPr>
             <a:picLocks noChangeAspect="1"/>
           </p:cNvPicPr>
@@ -5519,7 +5661,7 @@
                 </a:solidFill>
                 <a:latin typeface="Calibri"/>
               </a:rPr>
-              <a:t>rest of the world · deceptive drift absent (3 of 3)</a:t>
+              <a:t>rest of the world · deceptive drift absent (1 of 3)</a:t>
             </a:r>
           </a:p>
         </p:txBody>
@@ -5554,7 +5696,7 @@
                 </a:solidFill>
                 <a:latin typeface="Calibri"/>
               </a:rPr>
-              <a:t>18 / 19</a:t>
+              <a:t>18 / 21</a:t>
             </a:r>
           </a:p>
         </p:txBody>
@@ -5593,8 +5735,8 @@
         </p:nvSpPr>
         <p:spPr>
           <a:xfrm>
-            <a:off x="457200" y="292608"/>
-            <a:ext cx="9144000" cy="658368"/>
+            <a:off x="457200" y="274320"/>
+            <a:ext cx="9144000" cy="566928"/>
           </a:xfrm>
           <a:prstGeom prst="rect">
             <a:avLst/>
@@ -5609,13 +5751,13 @@
           <a:p>
             <a:pPr algn="ctr"/>
             <a:r>
-              <a:rPr sz="3000" b="1" i="0">
+              <a:rPr sz="2600" b="1" i="0">
                 <a:solidFill>
                   <a:srgbClr val="111111"/>
                 </a:solidFill>
                 <a:latin typeface="Calibri"/>
               </a:rPr>
-              <a:t>What the stack answers</a:t>
+              <a:t>United States — the trajectory</a:t>
             </a:r>
           </a:p>
         </p:txBody>
@@ -5628,7 +5770,7 @@
         </p:nvSpPr>
         <p:spPr>
           <a:xfrm>
-            <a:off x="457200" y="1042415"/>
+            <a:off x="457200" y="950976"/>
             <a:ext cx="9144000" cy="365760"/>
           </a:xfrm>
           <a:prstGeom prst="rect">
@@ -5650,21 +5792,45 @@
                 </a:solidFill>
                 <a:latin typeface="Calibri"/>
               </a:rPr>
-              <a:t>Recap of the five readings — then the live instrument takes over.</a:t>
-            </a:r>
-          </a:p>
-        </p:txBody>
-      </p:sp>
-      <p:sp>
-        <p:nvSpPr>
-          <p:cNvPr id="4" name="TextBox 3"/>
-          <p:cNvSpPr txBox="1"/>
-          <p:nvPr/>
-        </p:nvSpPr>
-        <p:spPr>
-          <a:xfrm>
-            <a:off x="822960" y="1828800"/>
-            <a:ext cx="1828800" cy="548640"/>
+              <a:t>United States: the full trajectory — a large grid; no deceptive drift at annual grain.</a:t>
+            </a:r>
+          </a:p>
+        </p:txBody>
+      </p:sp>
+      <p:pic>
+        <p:nvPicPr>
+          <p:cNvPr id="4" name="Picture 3" descr="image45.png"/>
+          <p:cNvPicPr>
+            <a:picLocks noChangeAspect="1"/>
+          </p:cNvPicPr>
+          <p:nvPr/>
+        </p:nvPicPr>
+        <p:blipFill>
+          <a:blip r:embed="rId2"/>
+          <a:stretch>
+            <a:fillRect/>
+          </a:stretch>
+        </p:blipFill>
+        <p:spPr>
+          <a:xfrm>
+            <a:off x="1143000" y="1417320"/>
+            <a:ext cx="7772400" cy="4855464"/>
+          </a:xfrm>
+          <a:prstGeom prst="rect">
+            <a:avLst/>
+          </a:prstGeom>
+        </p:spPr>
+      </p:pic>
+      <p:sp>
+        <p:nvSpPr>
+          <p:cNvPr id="5" name="TextBox 4"/>
+          <p:cNvSpPr txBox="1"/>
+          <p:nvPr/>
+        </p:nvSpPr>
+        <p:spPr>
+          <a:xfrm>
+            <a:off x="457200" y="7360920"/>
+            <a:ext cx="7315200" cy="310896"/>
           </a:xfrm>
           <a:prstGeom prst="rect">
             <a:avLst/>
@@ -5679,48 +5845,13 @@
           <a:p>
             <a:pPr algn="l"/>
             <a:r>
-              <a:rPr sz="2200" b="1" i="0">
-                <a:solidFill>
-                  <a:srgbClr val="000000"/>
-                </a:solidFill>
-                <a:latin typeface="Calibri"/>
-              </a:rPr>
-              <a:t>WHAT</a:t>
-            </a:r>
-          </a:p>
-        </p:txBody>
-      </p:sp>
-      <p:sp>
-        <p:nvSpPr>
-          <p:cNvPr id="5" name="TextBox 4"/>
-          <p:cNvSpPr txBox="1"/>
-          <p:nvPr/>
-        </p:nvSpPr>
-        <p:spPr>
-          <a:xfrm>
-            <a:off x="2743200" y="1828800"/>
-            <a:ext cx="4206240" cy="548640"/>
-          </a:xfrm>
-          <a:prstGeom prst="rect">
-            <a:avLst/>
-          </a:prstGeom>
-          <a:noFill/>
-        </p:spPr>
-        <p:txBody>
-          <a:bodyPr wrap="square" lIns="60000" rIns="60000" tIns="30000" bIns="30000">
-            <a:spAutoFit/>
-          </a:bodyPr>
-          <a:lstStyle/>
-          <a:p>
-            <a:pPr algn="l"/>
-            <a:r>
-              <a:rPr sz="1700" b="0" i="0">
-                <a:solidFill>
-                  <a:srgbClr val="111111"/>
-                </a:solidFill>
-                <a:latin typeface="Calibri"/>
-              </a:rPr>
-              <a:t>carriers are big.</a:t>
+              <a:rPr sz="1300" b="0" i="1">
+                <a:solidFill>
+                  <a:srgbClr val="707070"/>
+                </a:solidFill>
+                <a:latin typeface="Calibri"/>
+              </a:rPr>
+              <a:t>rest of the world · deceptive drift absent (2 of 3)</a:t>
             </a:r>
           </a:p>
         </p:txBody>
@@ -5728,566 +5859,6 @@
       <p:sp>
         <p:nvSpPr>
           <p:cNvPr id="6" name="TextBox 5"/>
-          <p:cNvSpPr txBox="1"/>
-          <p:nvPr/>
-        </p:nvSpPr>
-        <p:spPr>
-          <a:xfrm>
-            <a:off x="6766560" y="1828800"/>
-            <a:ext cx="2926080" cy="548640"/>
-          </a:xfrm>
-          <a:prstGeom prst="rect">
-            <a:avLst/>
-          </a:prstGeom>
-          <a:noFill/>
-        </p:spPr>
-        <p:txBody>
-          <a:bodyPr wrap="square" lIns="60000" rIns="60000" tIns="30000" bIns="30000">
-            <a:spAutoFit/>
-          </a:bodyPr>
-          <a:lstStyle/>
-          <a:p>
-            <a:pPr algn="l"/>
-            <a:r>
-              <a:rPr sz="1500" b="0" i="1">
-                <a:solidFill>
-                  <a:srgbClr val="555555"/>
-                </a:solidFill>
-                <a:latin typeface="Calibri"/>
-              </a:rPr>
-              <a:t>size view</a:t>
-            </a:r>
-          </a:p>
-        </p:txBody>
-      </p:sp>
-      <p:sp>
-        <p:nvSpPr>
-          <p:cNvPr id="7" name="TextBox 6"/>
-          <p:cNvSpPr txBox="1"/>
-          <p:nvPr/>
-        </p:nvSpPr>
-        <p:spPr>
-          <a:xfrm>
-            <a:off x="822960" y="2505456"/>
-            <a:ext cx="1828800" cy="548640"/>
-          </a:xfrm>
-          <a:prstGeom prst="rect">
-            <a:avLst/>
-          </a:prstGeom>
-          <a:noFill/>
-        </p:spPr>
-        <p:txBody>
-          <a:bodyPr wrap="square" lIns="60000" rIns="60000" tIns="30000" bIns="30000">
-            <a:spAutoFit/>
-          </a:bodyPr>
-          <a:lstStyle/>
-          <a:p>
-            <a:pPr algn="l"/>
-            <a:r>
-              <a:rPr sz="2200" b="1" i="0">
-                <a:solidFill>
-                  <a:srgbClr val="000000"/>
-                </a:solidFill>
-                <a:latin typeface="Calibri"/>
-              </a:rPr>
-              <a:t>WHO</a:t>
-            </a:r>
-          </a:p>
-        </p:txBody>
-      </p:sp>
-      <p:sp>
-        <p:nvSpPr>
-          <p:cNvPr id="8" name="TextBox 7"/>
-          <p:cNvSpPr txBox="1"/>
-          <p:nvPr/>
-        </p:nvSpPr>
-        <p:spPr>
-          <a:xfrm>
-            <a:off x="2743200" y="2505456"/>
-            <a:ext cx="4206240" cy="548640"/>
-          </a:xfrm>
-          <a:prstGeom prst="rect">
-            <a:avLst/>
-          </a:prstGeom>
-          <a:noFill/>
-        </p:spPr>
-        <p:txBody>
-          <a:bodyPr wrap="square" lIns="60000" rIns="60000" tIns="30000" bIns="30000">
-            <a:spAutoFit/>
-          </a:bodyPr>
-          <a:lstStyle/>
-          <a:p>
-            <a:pPr algn="l"/>
-            <a:r>
-              <a:rPr sz="1700" b="0" i="0">
-                <a:solidFill>
-                  <a:srgbClr val="111111"/>
-                </a:solidFill>
-                <a:latin typeface="Calibri"/>
-              </a:rPr>
-              <a:t>is in largest motion.</a:t>
-            </a:r>
-          </a:p>
-        </p:txBody>
-      </p:sp>
-      <p:sp>
-        <p:nvSpPr>
-          <p:cNvPr id="9" name="TextBox 8"/>
-          <p:cNvSpPr txBox="1"/>
-          <p:nvPr/>
-        </p:nvSpPr>
-        <p:spPr>
-          <a:xfrm>
-            <a:off x="6766560" y="2505456"/>
-            <a:ext cx="2926080" cy="548640"/>
-          </a:xfrm>
-          <a:prstGeom prst="rect">
-            <a:avLst/>
-          </a:prstGeom>
-          <a:noFill/>
-        </p:spPr>
-        <p:txBody>
-          <a:bodyPr wrap="square" lIns="60000" rIns="60000" tIns="30000" bIns="30000">
-            <a:spAutoFit/>
-          </a:bodyPr>
-          <a:lstStyle/>
-          <a:p>
-            <a:pPr algn="l"/>
-            <a:r>
-              <a:rPr sz="1500" b="0" i="1">
-                <a:solidFill>
-                  <a:srgbClr val="555555"/>
-                </a:solidFill>
-                <a:latin typeface="Calibri"/>
-              </a:rPr>
-              <a:t>Helmsman</a:t>
-            </a:r>
-          </a:p>
-        </p:txBody>
-      </p:sp>
-      <p:sp>
-        <p:nvSpPr>
-          <p:cNvPr id="10" name="TextBox 9"/>
-          <p:cNvSpPr txBox="1"/>
-          <p:nvPr/>
-        </p:nvSpPr>
-        <p:spPr>
-          <a:xfrm>
-            <a:off x="822960" y="3182112"/>
-            <a:ext cx="1828800" cy="548640"/>
-          </a:xfrm>
-          <a:prstGeom prst="rect">
-            <a:avLst/>
-          </a:prstGeom>
-          <a:noFill/>
-        </p:spPr>
-        <p:txBody>
-          <a:bodyPr wrap="square" lIns="60000" rIns="60000" tIns="30000" bIns="30000">
-            <a:spAutoFit/>
-          </a:bodyPr>
-          <a:lstStyle/>
-          <a:p>
-            <a:pPr algn="l"/>
-            <a:r>
-              <a:rPr sz="2200" b="1" i="0">
-                <a:solidFill>
-                  <a:srgbClr val="000000"/>
-                </a:solidFill>
-                <a:latin typeface="Calibri"/>
-              </a:rPr>
-              <a:t>WHEN</a:t>
-            </a:r>
-          </a:p>
-        </p:txBody>
-      </p:sp>
-      <p:sp>
-        <p:nvSpPr>
-          <p:cNvPr id="11" name="TextBox 10"/>
-          <p:cNvSpPr txBox="1"/>
-          <p:nvPr/>
-        </p:nvSpPr>
-        <p:spPr>
-          <a:xfrm>
-            <a:off x="2743200" y="3182112"/>
-            <a:ext cx="4206240" cy="548640"/>
-          </a:xfrm>
-          <a:prstGeom prst="rect">
-            <a:avLst/>
-          </a:prstGeom>
-          <a:noFill/>
-        </p:spPr>
-        <p:txBody>
-          <a:bodyPr wrap="square" lIns="60000" rIns="60000" tIns="30000" bIns="30000">
-            <a:spAutoFit/>
-          </a:bodyPr>
-          <a:lstStyle/>
-          <a:p>
-            <a:pPr algn="l"/>
-            <a:r>
-              <a:rPr sz="1700" b="0" i="0">
-                <a:solidFill>
-                  <a:srgbClr val="111111"/>
-                </a:solidFill>
-                <a:latin typeface="Calibri"/>
-              </a:rPr>
-              <a:t>the largest-motion carrier changes.</a:t>
-            </a:r>
-          </a:p>
-        </p:txBody>
-      </p:sp>
-      <p:sp>
-        <p:nvSpPr>
-          <p:cNvPr id="12" name="TextBox 11"/>
-          <p:cNvSpPr txBox="1"/>
-          <p:nvPr/>
-        </p:nvSpPr>
-        <p:spPr>
-          <a:xfrm>
-            <a:off x="6766560" y="3182112"/>
-            <a:ext cx="2926080" cy="548640"/>
-          </a:xfrm>
-          <a:prstGeom prst="rect">
-            <a:avLst/>
-          </a:prstGeom>
-          <a:noFill/>
-        </p:spPr>
-        <p:txBody>
-          <a:bodyPr wrap="square" lIns="60000" rIns="60000" tIns="30000" bIns="30000">
-            <a:spAutoFit/>
-          </a:bodyPr>
-          <a:lstStyle/>
-          <a:p>
-            <a:pPr algn="l"/>
-            <a:r>
-              <a:rPr sz="1500" b="0" i="1">
-                <a:solidFill>
-                  <a:srgbClr val="555555"/>
-                </a:solidFill>
-                <a:latin typeface="Calibri"/>
-              </a:rPr>
-              <a:t>Helmsman trajectory</a:t>
-            </a:r>
-          </a:p>
-        </p:txBody>
-      </p:sp>
-      <p:sp>
-        <p:nvSpPr>
-          <p:cNvPr id="13" name="TextBox 12"/>
-          <p:cNvSpPr txBox="1"/>
-          <p:nvPr/>
-        </p:nvSpPr>
-        <p:spPr>
-          <a:xfrm>
-            <a:off x="822960" y="3858768"/>
-            <a:ext cx="1828800" cy="548640"/>
-          </a:xfrm>
-          <a:prstGeom prst="rect">
-            <a:avLst/>
-          </a:prstGeom>
-          <a:noFill/>
-        </p:spPr>
-        <p:txBody>
-          <a:bodyPr wrap="square" lIns="60000" rIns="60000" tIns="30000" bIns="30000">
-            <a:spAutoFit/>
-          </a:bodyPr>
-          <a:lstStyle/>
-          <a:p>
-            <a:pPr algn="l"/>
-            <a:r>
-              <a:rPr sz="2200" b="1" i="0">
-                <a:solidFill>
-                  <a:srgbClr val="000000"/>
-                </a:solidFill>
-                <a:latin typeface="Calibri"/>
-              </a:rPr>
-              <a:t>HOW MUCH</a:t>
-            </a:r>
-          </a:p>
-        </p:txBody>
-      </p:sp>
-      <p:sp>
-        <p:nvSpPr>
-          <p:cNvPr id="14" name="TextBox 13"/>
-          <p:cNvSpPr txBox="1"/>
-          <p:nvPr/>
-        </p:nvSpPr>
-        <p:spPr>
-          <a:xfrm>
-            <a:off x="2743200" y="3858768"/>
-            <a:ext cx="4206240" cy="548640"/>
-          </a:xfrm>
-          <a:prstGeom prst="rect">
-            <a:avLst/>
-          </a:prstGeom>
-          <a:noFill/>
-        </p:spPr>
-        <p:txBody>
-          <a:bodyPr wrap="square" lIns="60000" rIns="60000" tIns="30000" bIns="30000">
-            <a:spAutoFit/>
-          </a:bodyPr>
-          <a:lstStyle/>
-          <a:p>
-            <a:pPr algn="l"/>
-            <a:r>
-              <a:rPr sz="1700" b="0" i="0">
-                <a:solidFill>
-                  <a:srgbClr val="111111"/>
-                </a:solidFill>
-                <a:latin typeface="Calibri"/>
-              </a:rPr>
-              <a:t>structural work each carrier did.</a:t>
-            </a:r>
-          </a:p>
-        </p:txBody>
-      </p:sp>
-      <p:sp>
-        <p:nvSpPr>
-          <p:cNvPr id="15" name="TextBox 14"/>
-          <p:cNvSpPr txBox="1"/>
-          <p:nvPr/>
-        </p:nvSpPr>
-        <p:spPr>
-          <a:xfrm>
-            <a:off x="6766560" y="3858768"/>
-            <a:ext cx="2926080" cy="548640"/>
-          </a:xfrm>
-          <a:prstGeom prst="rect">
-            <a:avLst/>
-          </a:prstGeom>
-          <a:noFill/>
-        </p:spPr>
-        <p:txBody>
-          <a:bodyPr wrap="square" lIns="60000" rIns="60000" tIns="30000" bIns="30000">
-            <a:spAutoFit/>
-          </a:bodyPr>
-          <a:lstStyle/>
-          <a:p>
-            <a:pPr algn="l"/>
-            <a:r>
-              <a:rPr sz="1500" b="0" i="1">
-                <a:solidFill>
-                  <a:srgbClr val="555555"/>
-                </a:solidFill>
-                <a:latin typeface="Calibri"/>
-              </a:rPr>
-              <a:t>Power Share</a:t>
-            </a:r>
-          </a:p>
-        </p:txBody>
-      </p:sp>
-      <p:sp>
-        <p:nvSpPr>
-          <p:cNvPr id="16" name="TextBox 15"/>
-          <p:cNvSpPr txBox="1"/>
-          <p:nvPr/>
-        </p:nvSpPr>
-        <p:spPr>
-          <a:xfrm>
-            <a:off x="822960" y="4535424"/>
-            <a:ext cx="1828800" cy="548640"/>
-          </a:xfrm>
-          <a:prstGeom prst="rect">
-            <a:avLst/>
-          </a:prstGeom>
-          <a:noFill/>
-        </p:spPr>
-        <p:txBody>
-          <a:bodyPr wrap="square" lIns="60000" rIns="60000" tIns="30000" bIns="30000">
-            <a:spAutoFit/>
-          </a:bodyPr>
-          <a:lstStyle/>
-          <a:p>
-            <a:pPr algn="l"/>
-            <a:r>
-              <a:rPr sz="2200" b="1" i="0">
-                <a:solidFill>
-                  <a:srgbClr val="000000"/>
-                </a:solidFill>
-                <a:latin typeface="Calibri"/>
-              </a:rPr>
-              <a:t>WHY</a:t>
-            </a:r>
-          </a:p>
-        </p:txBody>
-      </p:sp>
-      <p:sp>
-        <p:nvSpPr>
-          <p:cNvPr id="17" name="TextBox 16"/>
-          <p:cNvSpPr txBox="1"/>
-          <p:nvPr/>
-        </p:nvSpPr>
-        <p:spPr>
-          <a:xfrm>
-            <a:off x="2743200" y="4535424"/>
-            <a:ext cx="4206240" cy="548640"/>
-          </a:xfrm>
-          <a:prstGeom prst="rect">
-            <a:avLst/>
-          </a:prstGeom>
-          <a:noFill/>
-        </p:spPr>
-        <p:txBody>
-          <a:bodyPr wrap="square" lIns="60000" rIns="60000" tIns="30000" bIns="30000">
-            <a:spAutoFit/>
-          </a:bodyPr>
-          <a:lstStyle/>
-          <a:p>
-            <a:pPr algn="l"/>
-            <a:r>
-              <a:rPr sz="1700" b="0" i="0">
-                <a:solidFill>
-                  <a:srgbClr val="111111"/>
-                </a:solidFill>
-                <a:latin typeface="Calibri"/>
-              </a:rPr>
-              <a:t>a small carrier mattered.</a:t>
-            </a:r>
-          </a:p>
-        </p:txBody>
-      </p:sp>
-      <p:sp>
-        <p:nvSpPr>
-          <p:cNvPr id="18" name="TextBox 17"/>
-          <p:cNvSpPr txBox="1"/>
-          <p:nvPr/>
-        </p:nvSpPr>
-        <p:spPr>
-          <a:xfrm>
-            <a:off x="6766560" y="4535424"/>
-            <a:ext cx="2926080" cy="548640"/>
-          </a:xfrm>
-          <a:prstGeom prst="rect">
-            <a:avLst/>
-          </a:prstGeom>
-          <a:noFill/>
-        </p:spPr>
-        <p:txBody>
-          <a:bodyPr wrap="square" lIns="60000" rIns="60000" tIns="30000" bIns="30000">
-            <a:spAutoFit/>
-          </a:bodyPr>
-          <a:lstStyle/>
-          <a:p>
-            <a:pPr algn="l"/>
-            <a:r>
-              <a:rPr sz="1500" b="0" i="1">
-                <a:solidFill>
-                  <a:srgbClr val="555555"/>
-                </a:solidFill>
-                <a:latin typeface="Calibri"/>
-              </a:rPr>
-              <a:t>Activation Coefficient</a:t>
-            </a:r>
-          </a:p>
-        </p:txBody>
-      </p:sp>
-      <p:sp>
-        <p:nvSpPr>
-          <p:cNvPr id="19" name="TextBox 18"/>
-          <p:cNvSpPr txBox="1"/>
-          <p:nvPr/>
-        </p:nvSpPr>
-        <p:spPr>
-          <a:xfrm>
-            <a:off x="457200" y="5440680"/>
-            <a:ext cx="9144000" cy="457200"/>
-          </a:xfrm>
-          <a:prstGeom prst="rect">
-            <a:avLst/>
-          </a:prstGeom>
-          <a:noFill/>
-        </p:spPr>
-        <p:txBody>
-          <a:bodyPr wrap="square" lIns="60000" rIns="60000" tIns="30000" bIns="30000">
-            <a:spAutoFit/>
-          </a:bodyPr>
-          <a:lstStyle/>
-          <a:p>
-            <a:pPr algn="ctr"/>
-            <a:r>
-              <a:rPr sz="1600" b="1" i="1">
-                <a:solidFill>
-                  <a:srgbClr val="000000"/>
-                </a:solidFill>
-                <a:latin typeface="Calibri"/>
-              </a:rPr>
-              <a:t>The stack does not replace interpretation.  It gives interpretation a reproducible object.</a:t>
-            </a:r>
-          </a:p>
-        </p:txBody>
-      </p:sp>
-      <p:sp>
-        <p:nvSpPr>
-          <p:cNvPr id="20" name="TextBox 19"/>
-          <p:cNvSpPr txBox="1"/>
-          <p:nvPr/>
-        </p:nvSpPr>
-        <p:spPr>
-          <a:xfrm>
-            <a:off x="457200" y="6053328"/>
-            <a:ext cx="9144000" cy="457200"/>
-          </a:xfrm>
-          <a:prstGeom prst="rect">
-            <a:avLst/>
-          </a:prstGeom>
-          <a:noFill/>
-        </p:spPr>
-        <p:txBody>
-          <a:bodyPr wrap="square" lIns="60000" rIns="60000" tIns="30000" bIns="30000">
-            <a:spAutoFit/>
-          </a:bodyPr>
-          <a:lstStyle/>
-          <a:p>
-            <a:pPr algn="ctr"/>
-            <a:r>
-              <a:rPr sz="1600" b="1" i="0">
-                <a:solidFill>
-                  <a:srgbClr val="111111"/>
-                </a:solidFill>
-                <a:latin typeface="Calibri"/>
-              </a:rPr>
-              <a:t>The live instrument takes it from here  →   codawork2026_projector.html</a:t>
-            </a:r>
-          </a:p>
-        </p:txBody>
-      </p:sp>
-      <p:sp>
-        <p:nvSpPr>
-          <p:cNvPr id="21" name="TextBox 20"/>
-          <p:cNvSpPr txBox="1"/>
-          <p:nvPr/>
-        </p:nvSpPr>
-        <p:spPr>
-          <a:xfrm>
-            <a:off x="548640" y="6720840"/>
-            <a:ext cx="8961120" cy="640080"/>
-          </a:xfrm>
-          <a:prstGeom prst="rect">
-            <a:avLst/>
-          </a:prstGeom>
-          <a:noFill/>
-        </p:spPr>
-        <p:txBody>
-          <a:bodyPr wrap="square" lIns="60000" rIns="60000" tIns="30000" bIns="30000">
-            <a:spAutoFit/>
-          </a:bodyPr>
-          <a:lstStyle/>
-          <a:p>
-            <a:pPr algn="ctr"/>
-            <a:r>
-              <a:rPr sz="1200" b="0" i="0">
-                <a:solidFill>
-                  <a:srgbClr val="707070"/>
-                </a:solidFill>
-                <a:latin typeface="Calibri"/>
-              </a:rPr>
-              <a:t>AI Use Declaration (HUF-STD-001 v1.1): research design, mathematical content, code, and scientific responsibility remain with the named author. AI assistants (Claude, ChatGPT, Grok) used for drafting, sweeps, and reviews. Author retains full responsibility.  Apache-2.0 code · CC BY 4.0 docs.</a:t>
-            </a:r>
-          </a:p>
-        </p:txBody>
-      </p:sp>
-      <p:sp>
-        <p:nvSpPr>
-          <p:cNvPr id="22" name="TextBox 21"/>
           <p:cNvSpPr txBox="1"/>
           <p:nvPr/>
         </p:nvSpPr>
@@ -6315,7 +5886,7 @@
                 </a:solidFill>
                 <a:latin typeface="Calibri"/>
               </a:rPr>
-              <a:t>19 / 19</a:t>
+              <a:t>19 / 21</a:t>
             </a:r>
           </a:p>
         </p:txBody>
@@ -6810,7 +6381,958 @@
                 </a:solidFill>
                 <a:latin typeface="Calibri"/>
               </a:rPr>
-              <a:t>2 / 19</a:t>
+              <a:t>2 / 21</a:t>
+            </a:r>
+          </a:p>
+        </p:txBody>
+      </p:sp>
+    </p:spTree>
+  </p:cSld>
+  <p:clrMapOvr>
+    <a:masterClrMapping/>
+  </p:clrMapOvr>
+</p:sld>
+</file>
+
+<file path=ppt/slides/slide20.xml><?xml version="1.0" encoding="utf-8"?>
+<p:sld xmlns:a="http://schemas.openxmlformats.org/drawingml/2006/main" xmlns:p="http://schemas.openxmlformats.org/presentationml/2006/main" xmlns:r="http://schemas.openxmlformats.org/officeDocument/2006/relationships">
+  <p:cSld>
+    <p:bg>
+      <p:bgPr>
+        <a:solidFill>
+          <a:srgbClr val="FFFFFF"/>
+        </a:solidFill>
+        <a:effectLst/>
+      </p:bgPr>
+    </p:bg>
+    <p:spTree>
+      <p:nvGrpSpPr>
+        <p:cNvPr id="1" name=""/>
+        <p:cNvGrpSpPr/>
+        <p:nvPr/>
+      </p:nvGrpSpPr>
+      <p:grpSpPr/>
+      <p:sp>
+        <p:nvSpPr>
+          <p:cNvPr id="2" name="TextBox 1"/>
+          <p:cNvSpPr txBox="1"/>
+          <p:nvPr/>
+        </p:nvSpPr>
+        <p:spPr>
+          <a:xfrm>
+            <a:off x="457200" y="274320"/>
+            <a:ext cx="9144000" cy="566928"/>
+          </a:xfrm>
+          <a:prstGeom prst="rect">
+            <a:avLst/>
+          </a:prstGeom>
+          <a:noFill/>
+        </p:spPr>
+        <p:txBody>
+          <a:bodyPr wrap="square" lIns="60000" rIns="60000" tIns="30000" bIns="30000">
+            <a:spAutoFit/>
+          </a:bodyPr>
+          <a:lstStyle/>
+          <a:p>
+            <a:pPr algn="ctr"/>
+            <a:r>
+              <a:rPr sz="2600" b="1" i="0">
+                <a:solidFill>
+                  <a:srgbClr val="111111"/>
+                </a:solidFill>
+                <a:latin typeface="Calibri"/>
+              </a:rPr>
+              <a:t>World — the trajectory</a:t>
+            </a:r>
+          </a:p>
+        </p:txBody>
+      </p:sp>
+      <p:sp>
+        <p:nvSpPr>
+          <p:cNvPr id="3" name="TextBox 2"/>
+          <p:cNvSpPr txBox="1"/>
+          <p:nvPr/>
+        </p:nvSpPr>
+        <p:spPr>
+          <a:xfrm>
+            <a:off x="457200" y="950976"/>
+            <a:ext cx="9144000" cy="365760"/>
+          </a:xfrm>
+          <a:prstGeom prst="rect">
+            <a:avLst/>
+          </a:prstGeom>
+          <a:noFill/>
+        </p:spPr>
+        <p:txBody>
+          <a:bodyPr wrap="square" lIns="60000" rIns="60000" tIns="30000" bIns="30000">
+            <a:spAutoFit/>
+          </a:bodyPr>
+          <a:lstStyle/>
+          <a:p>
+            <a:pPr algn="ctr"/>
+            <a:r>
+              <a:rPr sz="1500" b="1" i="1">
+                <a:solidFill>
+                  <a:srgbClr val="333333"/>
+                </a:solidFill>
+                <a:latin typeface="Calibri"/>
+              </a:rPr>
+              <a:t>World: the aggregate trajectory — large-N smoothing hides the deceptive drift in its constituents.</a:t>
+            </a:r>
+          </a:p>
+        </p:txBody>
+      </p:sp>
+      <p:pic>
+        <p:nvPicPr>
+          <p:cNvPr id="4" name="Picture 3" descr="image51.png"/>
+          <p:cNvPicPr>
+            <a:picLocks noChangeAspect="1"/>
+          </p:cNvPicPr>
+          <p:nvPr/>
+        </p:nvPicPr>
+        <p:blipFill>
+          <a:blip r:embed="rId2"/>
+          <a:stretch>
+            <a:fillRect/>
+          </a:stretch>
+        </p:blipFill>
+        <p:spPr>
+          <a:xfrm>
+            <a:off x="1143000" y="1417320"/>
+            <a:ext cx="7772400" cy="4855464"/>
+          </a:xfrm>
+          <a:prstGeom prst="rect">
+            <a:avLst/>
+          </a:prstGeom>
+        </p:spPr>
+      </p:pic>
+      <p:sp>
+        <p:nvSpPr>
+          <p:cNvPr id="5" name="TextBox 4"/>
+          <p:cNvSpPr txBox="1"/>
+          <p:nvPr/>
+        </p:nvSpPr>
+        <p:spPr>
+          <a:xfrm>
+            <a:off x="457200" y="7360920"/>
+            <a:ext cx="7315200" cy="310896"/>
+          </a:xfrm>
+          <a:prstGeom prst="rect">
+            <a:avLst/>
+          </a:prstGeom>
+          <a:noFill/>
+        </p:spPr>
+        <p:txBody>
+          <a:bodyPr wrap="square" lIns="60000" rIns="60000" tIns="30000" bIns="30000">
+            <a:spAutoFit/>
+          </a:bodyPr>
+          <a:lstStyle/>
+          <a:p>
+            <a:pPr algn="l"/>
+            <a:r>
+              <a:rPr sz="1300" b="0" i="1">
+                <a:solidFill>
+                  <a:srgbClr val="707070"/>
+                </a:solidFill>
+                <a:latin typeface="Calibri"/>
+              </a:rPr>
+              <a:t>rest of the world · deceptive drift absent (3 of 3)</a:t>
+            </a:r>
+          </a:p>
+        </p:txBody>
+      </p:sp>
+      <p:sp>
+        <p:nvSpPr>
+          <p:cNvPr id="6" name="TextBox 5"/>
+          <p:cNvSpPr txBox="1"/>
+          <p:nvPr/>
+        </p:nvSpPr>
+        <p:spPr>
+          <a:xfrm>
+            <a:off x="8412480" y="7342631"/>
+            <a:ext cx="1188720" cy="329184"/>
+          </a:xfrm>
+          <a:prstGeom prst="rect">
+            <a:avLst/>
+          </a:prstGeom>
+          <a:noFill/>
+        </p:spPr>
+        <p:txBody>
+          <a:bodyPr wrap="square" lIns="60000" rIns="60000" tIns="30000" bIns="30000">
+            <a:spAutoFit/>
+          </a:bodyPr>
+          <a:lstStyle/>
+          <a:p>
+            <a:pPr algn="r"/>
+            <a:r>
+              <a:rPr sz="1500" b="1" i="0">
+                <a:solidFill>
+                  <a:srgbClr val="555555"/>
+                </a:solidFill>
+                <a:latin typeface="Calibri"/>
+              </a:rPr>
+              <a:t>20 / 21</a:t>
+            </a:r>
+          </a:p>
+        </p:txBody>
+      </p:sp>
+    </p:spTree>
+  </p:cSld>
+  <p:clrMapOvr>
+    <a:masterClrMapping/>
+  </p:clrMapOvr>
+</p:sld>
+</file>
+
+<file path=ppt/slides/slide21.xml><?xml version="1.0" encoding="utf-8"?>
+<p:sld xmlns:a="http://schemas.openxmlformats.org/drawingml/2006/main" xmlns:p="http://schemas.openxmlformats.org/presentationml/2006/main" xmlns:r="http://schemas.openxmlformats.org/officeDocument/2006/relationships">
+  <p:cSld>
+    <p:bg>
+      <p:bgPr>
+        <a:solidFill>
+          <a:srgbClr val="FFFFFF"/>
+        </a:solidFill>
+        <a:effectLst/>
+      </p:bgPr>
+    </p:bg>
+    <p:spTree>
+      <p:nvGrpSpPr>
+        <p:cNvPr id="1" name=""/>
+        <p:cNvGrpSpPr/>
+        <p:nvPr/>
+      </p:nvGrpSpPr>
+      <p:grpSpPr/>
+      <p:sp>
+        <p:nvSpPr>
+          <p:cNvPr id="2" name="TextBox 1"/>
+          <p:cNvSpPr txBox="1"/>
+          <p:nvPr/>
+        </p:nvSpPr>
+        <p:spPr>
+          <a:xfrm>
+            <a:off x="457200" y="292608"/>
+            <a:ext cx="9144000" cy="658368"/>
+          </a:xfrm>
+          <a:prstGeom prst="rect">
+            <a:avLst/>
+          </a:prstGeom>
+          <a:noFill/>
+        </p:spPr>
+        <p:txBody>
+          <a:bodyPr wrap="square" lIns="60000" rIns="60000" tIns="30000" bIns="30000">
+            <a:spAutoFit/>
+          </a:bodyPr>
+          <a:lstStyle/>
+          <a:p>
+            <a:pPr algn="ctr"/>
+            <a:r>
+              <a:rPr sz="3000" b="1" i="0">
+                <a:solidFill>
+                  <a:srgbClr val="111111"/>
+                </a:solidFill>
+                <a:latin typeface="Calibri"/>
+              </a:rPr>
+              <a:t>What the stack answers</a:t>
+            </a:r>
+          </a:p>
+        </p:txBody>
+      </p:sp>
+      <p:sp>
+        <p:nvSpPr>
+          <p:cNvPr id="3" name="TextBox 2"/>
+          <p:cNvSpPr txBox="1"/>
+          <p:nvPr/>
+        </p:nvSpPr>
+        <p:spPr>
+          <a:xfrm>
+            <a:off x="457200" y="1042415"/>
+            <a:ext cx="9144000" cy="365760"/>
+          </a:xfrm>
+          <a:prstGeom prst="rect">
+            <a:avLst/>
+          </a:prstGeom>
+          <a:noFill/>
+        </p:spPr>
+        <p:txBody>
+          <a:bodyPr wrap="square" lIns="60000" rIns="60000" tIns="30000" bIns="30000">
+            <a:spAutoFit/>
+          </a:bodyPr>
+          <a:lstStyle/>
+          <a:p>
+            <a:pPr algn="ctr"/>
+            <a:r>
+              <a:rPr sz="1500" b="1" i="1">
+                <a:solidFill>
+                  <a:srgbClr val="333333"/>
+                </a:solidFill>
+                <a:latin typeface="Calibri"/>
+              </a:rPr>
+              <a:t>Recap of the five readings — then the live instrument takes over.</a:t>
+            </a:r>
+          </a:p>
+        </p:txBody>
+      </p:sp>
+      <p:sp>
+        <p:nvSpPr>
+          <p:cNvPr id="4" name="TextBox 3"/>
+          <p:cNvSpPr txBox="1"/>
+          <p:nvPr/>
+        </p:nvSpPr>
+        <p:spPr>
+          <a:xfrm>
+            <a:off x="822960" y="1828800"/>
+            <a:ext cx="1828800" cy="548640"/>
+          </a:xfrm>
+          <a:prstGeom prst="rect">
+            <a:avLst/>
+          </a:prstGeom>
+          <a:noFill/>
+        </p:spPr>
+        <p:txBody>
+          <a:bodyPr wrap="square" lIns="60000" rIns="60000" tIns="30000" bIns="30000">
+            <a:spAutoFit/>
+          </a:bodyPr>
+          <a:lstStyle/>
+          <a:p>
+            <a:pPr algn="l"/>
+            <a:r>
+              <a:rPr sz="2200" b="1" i="0">
+                <a:solidFill>
+                  <a:srgbClr val="000000"/>
+                </a:solidFill>
+                <a:latin typeface="Calibri"/>
+              </a:rPr>
+              <a:t>WHAT</a:t>
+            </a:r>
+          </a:p>
+        </p:txBody>
+      </p:sp>
+      <p:sp>
+        <p:nvSpPr>
+          <p:cNvPr id="5" name="TextBox 4"/>
+          <p:cNvSpPr txBox="1"/>
+          <p:nvPr/>
+        </p:nvSpPr>
+        <p:spPr>
+          <a:xfrm>
+            <a:off x="2743200" y="1828800"/>
+            <a:ext cx="4206240" cy="548640"/>
+          </a:xfrm>
+          <a:prstGeom prst="rect">
+            <a:avLst/>
+          </a:prstGeom>
+          <a:noFill/>
+        </p:spPr>
+        <p:txBody>
+          <a:bodyPr wrap="square" lIns="60000" rIns="60000" tIns="30000" bIns="30000">
+            <a:spAutoFit/>
+          </a:bodyPr>
+          <a:lstStyle/>
+          <a:p>
+            <a:pPr algn="l"/>
+            <a:r>
+              <a:rPr sz="1700" b="0" i="0">
+                <a:solidFill>
+                  <a:srgbClr val="111111"/>
+                </a:solidFill>
+                <a:latin typeface="Calibri"/>
+              </a:rPr>
+              <a:t>carriers are big.</a:t>
+            </a:r>
+          </a:p>
+        </p:txBody>
+      </p:sp>
+      <p:sp>
+        <p:nvSpPr>
+          <p:cNvPr id="6" name="TextBox 5"/>
+          <p:cNvSpPr txBox="1"/>
+          <p:nvPr/>
+        </p:nvSpPr>
+        <p:spPr>
+          <a:xfrm>
+            <a:off x="6766560" y="1828800"/>
+            <a:ext cx="2926080" cy="548640"/>
+          </a:xfrm>
+          <a:prstGeom prst="rect">
+            <a:avLst/>
+          </a:prstGeom>
+          <a:noFill/>
+        </p:spPr>
+        <p:txBody>
+          <a:bodyPr wrap="square" lIns="60000" rIns="60000" tIns="30000" bIns="30000">
+            <a:spAutoFit/>
+          </a:bodyPr>
+          <a:lstStyle/>
+          <a:p>
+            <a:pPr algn="l"/>
+            <a:r>
+              <a:rPr sz="1500" b="0" i="1">
+                <a:solidFill>
+                  <a:srgbClr val="555555"/>
+                </a:solidFill>
+                <a:latin typeface="Calibri"/>
+              </a:rPr>
+              <a:t>size view</a:t>
+            </a:r>
+          </a:p>
+        </p:txBody>
+      </p:sp>
+      <p:sp>
+        <p:nvSpPr>
+          <p:cNvPr id="7" name="TextBox 6"/>
+          <p:cNvSpPr txBox="1"/>
+          <p:nvPr/>
+        </p:nvSpPr>
+        <p:spPr>
+          <a:xfrm>
+            <a:off x="822960" y="2505456"/>
+            <a:ext cx="1828800" cy="548640"/>
+          </a:xfrm>
+          <a:prstGeom prst="rect">
+            <a:avLst/>
+          </a:prstGeom>
+          <a:noFill/>
+        </p:spPr>
+        <p:txBody>
+          <a:bodyPr wrap="square" lIns="60000" rIns="60000" tIns="30000" bIns="30000">
+            <a:spAutoFit/>
+          </a:bodyPr>
+          <a:lstStyle/>
+          <a:p>
+            <a:pPr algn="l"/>
+            <a:r>
+              <a:rPr sz="2200" b="1" i="0">
+                <a:solidFill>
+                  <a:srgbClr val="000000"/>
+                </a:solidFill>
+                <a:latin typeface="Calibri"/>
+              </a:rPr>
+              <a:t>WHO</a:t>
+            </a:r>
+          </a:p>
+        </p:txBody>
+      </p:sp>
+      <p:sp>
+        <p:nvSpPr>
+          <p:cNvPr id="8" name="TextBox 7"/>
+          <p:cNvSpPr txBox="1"/>
+          <p:nvPr/>
+        </p:nvSpPr>
+        <p:spPr>
+          <a:xfrm>
+            <a:off x="2743200" y="2505456"/>
+            <a:ext cx="4206240" cy="548640"/>
+          </a:xfrm>
+          <a:prstGeom prst="rect">
+            <a:avLst/>
+          </a:prstGeom>
+          <a:noFill/>
+        </p:spPr>
+        <p:txBody>
+          <a:bodyPr wrap="square" lIns="60000" rIns="60000" tIns="30000" bIns="30000">
+            <a:spAutoFit/>
+          </a:bodyPr>
+          <a:lstStyle/>
+          <a:p>
+            <a:pPr algn="l"/>
+            <a:r>
+              <a:rPr sz="1700" b="0" i="0">
+                <a:solidFill>
+                  <a:srgbClr val="111111"/>
+                </a:solidFill>
+                <a:latin typeface="Calibri"/>
+              </a:rPr>
+              <a:t>is in largest motion.</a:t>
+            </a:r>
+          </a:p>
+        </p:txBody>
+      </p:sp>
+      <p:sp>
+        <p:nvSpPr>
+          <p:cNvPr id="9" name="TextBox 8"/>
+          <p:cNvSpPr txBox="1"/>
+          <p:nvPr/>
+        </p:nvSpPr>
+        <p:spPr>
+          <a:xfrm>
+            <a:off x="6766560" y="2505456"/>
+            <a:ext cx="2926080" cy="548640"/>
+          </a:xfrm>
+          <a:prstGeom prst="rect">
+            <a:avLst/>
+          </a:prstGeom>
+          <a:noFill/>
+        </p:spPr>
+        <p:txBody>
+          <a:bodyPr wrap="square" lIns="60000" rIns="60000" tIns="30000" bIns="30000">
+            <a:spAutoFit/>
+          </a:bodyPr>
+          <a:lstStyle/>
+          <a:p>
+            <a:pPr algn="l"/>
+            <a:r>
+              <a:rPr sz="1500" b="0" i="1">
+                <a:solidFill>
+                  <a:srgbClr val="555555"/>
+                </a:solidFill>
+                <a:latin typeface="Calibri"/>
+              </a:rPr>
+              <a:t>Helmsman</a:t>
+            </a:r>
+          </a:p>
+        </p:txBody>
+      </p:sp>
+      <p:sp>
+        <p:nvSpPr>
+          <p:cNvPr id="10" name="TextBox 9"/>
+          <p:cNvSpPr txBox="1"/>
+          <p:nvPr/>
+        </p:nvSpPr>
+        <p:spPr>
+          <a:xfrm>
+            <a:off x="822960" y="3182112"/>
+            <a:ext cx="1828800" cy="548640"/>
+          </a:xfrm>
+          <a:prstGeom prst="rect">
+            <a:avLst/>
+          </a:prstGeom>
+          <a:noFill/>
+        </p:spPr>
+        <p:txBody>
+          <a:bodyPr wrap="square" lIns="60000" rIns="60000" tIns="30000" bIns="30000">
+            <a:spAutoFit/>
+          </a:bodyPr>
+          <a:lstStyle/>
+          <a:p>
+            <a:pPr algn="l"/>
+            <a:r>
+              <a:rPr sz="2200" b="1" i="0">
+                <a:solidFill>
+                  <a:srgbClr val="000000"/>
+                </a:solidFill>
+                <a:latin typeface="Calibri"/>
+              </a:rPr>
+              <a:t>WHEN</a:t>
+            </a:r>
+          </a:p>
+        </p:txBody>
+      </p:sp>
+      <p:sp>
+        <p:nvSpPr>
+          <p:cNvPr id="11" name="TextBox 10"/>
+          <p:cNvSpPr txBox="1"/>
+          <p:nvPr/>
+        </p:nvSpPr>
+        <p:spPr>
+          <a:xfrm>
+            <a:off x="2743200" y="3182112"/>
+            <a:ext cx="4206240" cy="548640"/>
+          </a:xfrm>
+          <a:prstGeom prst="rect">
+            <a:avLst/>
+          </a:prstGeom>
+          <a:noFill/>
+        </p:spPr>
+        <p:txBody>
+          <a:bodyPr wrap="square" lIns="60000" rIns="60000" tIns="30000" bIns="30000">
+            <a:spAutoFit/>
+          </a:bodyPr>
+          <a:lstStyle/>
+          <a:p>
+            <a:pPr algn="l"/>
+            <a:r>
+              <a:rPr sz="1700" b="0" i="0">
+                <a:solidFill>
+                  <a:srgbClr val="111111"/>
+                </a:solidFill>
+                <a:latin typeface="Calibri"/>
+              </a:rPr>
+              <a:t>the largest-motion carrier changes.</a:t>
+            </a:r>
+          </a:p>
+        </p:txBody>
+      </p:sp>
+      <p:sp>
+        <p:nvSpPr>
+          <p:cNvPr id="12" name="TextBox 11"/>
+          <p:cNvSpPr txBox="1"/>
+          <p:nvPr/>
+        </p:nvSpPr>
+        <p:spPr>
+          <a:xfrm>
+            <a:off x="6766560" y="3182112"/>
+            <a:ext cx="2926080" cy="548640"/>
+          </a:xfrm>
+          <a:prstGeom prst="rect">
+            <a:avLst/>
+          </a:prstGeom>
+          <a:noFill/>
+        </p:spPr>
+        <p:txBody>
+          <a:bodyPr wrap="square" lIns="60000" rIns="60000" tIns="30000" bIns="30000">
+            <a:spAutoFit/>
+          </a:bodyPr>
+          <a:lstStyle/>
+          <a:p>
+            <a:pPr algn="l"/>
+            <a:r>
+              <a:rPr sz="1500" b="0" i="1">
+                <a:solidFill>
+                  <a:srgbClr val="555555"/>
+                </a:solidFill>
+                <a:latin typeface="Calibri"/>
+              </a:rPr>
+              <a:t>Helmsman trajectory</a:t>
+            </a:r>
+          </a:p>
+        </p:txBody>
+      </p:sp>
+      <p:sp>
+        <p:nvSpPr>
+          <p:cNvPr id="13" name="TextBox 12"/>
+          <p:cNvSpPr txBox="1"/>
+          <p:nvPr/>
+        </p:nvSpPr>
+        <p:spPr>
+          <a:xfrm>
+            <a:off x="822960" y="3858768"/>
+            <a:ext cx="1828800" cy="548640"/>
+          </a:xfrm>
+          <a:prstGeom prst="rect">
+            <a:avLst/>
+          </a:prstGeom>
+          <a:noFill/>
+        </p:spPr>
+        <p:txBody>
+          <a:bodyPr wrap="square" lIns="60000" rIns="60000" tIns="30000" bIns="30000">
+            <a:spAutoFit/>
+          </a:bodyPr>
+          <a:lstStyle/>
+          <a:p>
+            <a:pPr algn="l"/>
+            <a:r>
+              <a:rPr sz="2200" b="1" i="0">
+                <a:solidFill>
+                  <a:srgbClr val="000000"/>
+                </a:solidFill>
+                <a:latin typeface="Calibri"/>
+              </a:rPr>
+              <a:t>HOW MUCH</a:t>
+            </a:r>
+          </a:p>
+        </p:txBody>
+      </p:sp>
+      <p:sp>
+        <p:nvSpPr>
+          <p:cNvPr id="14" name="TextBox 13"/>
+          <p:cNvSpPr txBox="1"/>
+          <p:nvPr/>
+        </p:nvSpPr>
+        <p:spPr>
+          <a:xfrm>
+            <a:off x="2743200" y="3858768"/>
+            <a:ext cx="4206240" cy="548640"/>
+          </a:xfrm>
+          <a:prstGeom prst="rect">
+            <a:avLst/>
+          </a:prstGeom>
+          <a:noFill/>
+        </p:spPr>
+        <p:txBody>
+          <a:bodyPr wrap="square" lIns="60000" rIns="60000" tIns="30000" bIns="30000">
+            <a:spAutoFit/>
+          </a:bodyPr>
+          <a:lstStyle/>
+          <a:p>
+            <a:pPr algn="l"/>
+            <a:r>
+              <a:rPr sz="1700" b="0" i="0">
+                <a:solidFill>
+                  <a:srgbClr val="111111"/>
+                </a:solidFill>
+                <a:latin typeface="Calibri"/>
+              </a:rPr>
+              <a:t>structural work each carrier did.</a:t>
+            </a:r>
+          </a:p>
+        </p:txBody>
+      </p:sp>
+      <p:sp>
+        <p:nvSpPr>
+          <p:cNvPr id="15" name="TextBox 14"/>
+          <p:cNvSpPr txBox="1"/>
+          <p:nvPr/>
+        </p:nvSpPr>
+        <p:spPr>
+          <a:xfrm>
+            <a:off x="6766560" y="3858768"/>
+            <a:ext cx="2926080" cy="548640"/>
+          </a:xfrm>
+          <a:prstGeom prst="rect">
+            <a:avLst/>
+          </a:prstGeom>
+          <a:noFill/>
+        </p:spPr>
+        <p:txBody>
+          <a:bodyPr wrap="square" lIns="60000" rIns="60000" tIns="30000" bIns="30000">
+            <a:spAutoFit/>
+          </a:bodyPr>
+          <a:lstStyle/>
+          <a:p>
+            <a:pPr algn="l"/>
+            <a:r>
+              <a:rPr sz="1500" b="0" i="1">
+                <a:solidFill>
+                  <a:srgbClr val="555555"/>
+                </a:solidFill>
+                <a:latin typeface="Calibri"/>
+              </a:rPr>
+              <a:t>Power Share</a:t>
+            </a:r>
+          </a:p>
+        </p:txBody>
+      </p:sp>
+      <p:sp>
+        <p:nvSpPr>
+          <p:cNvPr id="16" name="TextBox 15"/>
+          <p:cNvSpPr txBox="1"/>
+          <p:nvPr/>
+        </p:nvSpPr>
+        <p:spPr>
+          <a:xfrm>
+            <a:off x="822960" y="4535424"/>
+            <a:ext cx="1828800" cy="548640"/>
+          </a:xfrm>
+          <a:prstGeom prst="rect">
+            <a:avLst/>
+          </a:prstGeom>
+          <a:noFill/>
+        </p:spPr>
+        <p:txBody>
+          <a:bodyPr wrap="square" lIns="60000" rIns="60000" tIns="30000" bIns="30000">
+            <a:spAutoFit/>
+          </a:bodyPr>
+          <a:lstStyle/>
+          <a:p>
+            <a:pPr algn="l"/>
+            <a:r>
+              <a:rPr sz="2200" b="1" i="0">
+                <a:solidFill>
+                  <a:srgbClr val="000000"/>
+                </a:solidFill>
+                <a:latin typeface="Calibri"/>
+              </a:rPr>
+              <a:t>WHY</a:t>
+            </a:r>
+          </a:p>
+        </p:txBody>
+      </p:sp>
+      <p:sp>
+        <p:nvSpPr>
+          <p:cNvPr id="17" name="TextBox 16"/>
+          <p:cNvSpPr txBox="1"/>
+          <p:nvPr/>
+        </p:nvSpPr>
+        <p:spPr>
+          <a:xfrm>
+            <a:off x="2743200" y="4535424"/>
+            <a:ext cx="4206240" cy="548640"/>
+          </a:xfrm>
+          <a:prstGeom prst="rect">
+            <a:avLst/>
+          </a:prstGeom>
+          <a:noFill/>
+        </p:spPr>
+        <p:txBody>
+          <a:bodyPr wrap="square" lIns="60000" rIns="60000" tIns="30000" bIns="30000">
+            <a:spAutoFit/>
+          </a:bodyPr>
+          <a:lstStyle/>
+          <a:p>
+            <a:pPr algn="l"/>
+            <a:r>
+              <a:rPr sz="1700" b="0" i="0">
+                <a:solidFill>
+                  <a:srgbClr val="111111"/>
+                </a:solidFill>
+                <a:latin typeface="Calibri"/>
+              </a:rPr>
+              <a:t>a small carrier mattered.</a:t>
+            </a:r>
+          </a:p>
+        </p:txBody>
+      </p:sp>
+      <p:sp>
+        <p:nvSpPr>
+          <p:cNvPr id="18" name="TextBox 17"/>
+          <p:cNvSpPr txBox="1"/>
+          <p:nvPr/>
+        </p:nvSpPr>
+        <p:spPr>
+          <a:xfrm>
+            <a:off x="6766560" y="4535424"/>
+            <a:ext cx="2926080" cy="548640"/>
+          </a:xfrm>
+          <a:prstGeom prst="rect">
+            <a:avLst/>
+          </a:prstGeom>
+          <a:noFill/>
+        </p:spPr>
+        <p:txBody>
+          <a:bodyPr wrap="square" lIns="60000" rIns="60000" tIns="30000" bIns="30000">
+            <a:spAutoFit/>
+          </a:bodyPr>
+          <a:lstStyle/>
+          <a:p>
+            <a:pPr algn="l"/>
+            <a:r>
+              <a:rPr sz="1500" b="0" i="1">
+                <a:solidFill>
+                  <a:srgbClr val="555555"/>
+                </a:solidFill>
+                <a:latin typeface="Calibri"/>
+              </a:rPr>
+              <a:t>Activation Coefficient</a:t>
+            </a:r>
+          </a:p>
+        </p:txBody>
+      </p:sp>
+      <p:sp>
+        <p:nvSpPr>
+          <p:cNvPr id="19" name="TextBox 18"/>
+          <p:cNvSpPr txBox="1"/>
+          <p:nvPr/>
+        </p:nvSpPr>
+        <p:spPr>
+          <a:xfrm>
+            <a:off x="457200" y="5440680"/>
+            <a:ext cx="9144000" cy="457200"/>
+          </a:xfrm>
+          <a:prstGeom prst="rect">
+            <a:avLst/>
+          </a:prstGeom>
+          <a:noFill/>
+        </p:spPr>
+        <p:txBody>
+          <a:bodyPr wrap="square" lIns="60000" rIns="60000" tIns="30000" bIns="30000">
+            <a:spAutoFit/>
+          </a:bodyPr>
+          <a:lstStyle/>
+          <a:p>
+            <a:pPr algn="ctr"/>
+            <a:r>
+              <a:rPr sz="1600" b="1" i="1">
+                <a:solidFill>
+                  <a:srgbClr val="000000"/>
+                </a:solidFill>
+                <a:latin typeface="Calibri"/>
+              </a:rPr>
+              <a:t>The stack does not replace interpretation.  It gives interpretation a reproducible object.</a:t>
+            </a:r>
+          </a:p>
+        </p:txBody>
+      </p:sp>
+      <p:sp>
+        <p:nvSpPr>
+          <p:cNvPr id="20" name="TextBox 19"/>
+          <p:cNvSpPr txBox="1"/>
+          <p:nvPr/>
+        </p:nvSpPr>
+        <p:spPr>
+          <a:xfrm>
+            <a:off x="457200" y="6053328"/>
+            <a:ext cx="9144000" cy="457200"/>
+          </a:xfrm>
+          <a:prstGeom prst="rect">
+            <a:avLst/>
+          </a:prstGeom>
+          <a:noFill/>
+        </p:spPr>
+        <p:txBody>
+          <a:bodyPr wrap="square" lIns="60000" rIns="60000" tIns="30000" bIns="30000">
+            <a:spAutoFit/>
+          </a:bodyPr>
+          <a:lstStyle/>
+          <a:p>
+            <a:pPr algn="ctr"/>
+            <a:r>
+              <a:rPr sz="1600" b="1" i="0">
+                <a:solidFill>
+                  <a:srgbClr val="111111"/>
+                </a:solidFill>
+                <a:latin typeface="Calibri"/>
+              </a:rPr>
+              <a:t>The live instrument takes it from here  →   codawork2026_projector.html</a:t>
+            </a:r>
+          </a:p>
+        </p:txBody>
+      </p:sp>
+      <p:sp>
+        <p:nvSpPr>
+          <p:cNvPr id="21" name="TextBox 20"/>
+          <p:cNvSpPr txBox="1"/>
+          <p:nvPr/>
+        </p:nvSpPr>
+        <p:spPr>
+          <a:xfrm>
+            <a:off x="548640" y="6720840"/>
+            <a:ext cx="8961120" cy="640080"/>
+          </a:xfrm>
+          <a:prstGeom prst="rect">
+            <a:avLst/>
+          </a:prstGeom>
+          <a:noFill/>
+        </p:spPr>
+        <p:txBody>
+          <a:bodyPr wrap="square" lIns="60000" rIns="60000" tIns="30000" bIns="30000">
+            <a:spAutoFit/>
+          </a:bodyPr>
+          <a:lstStyle/>
+          <a:p>
+            <a:pPr algn="ctr"/>
+            <a:r>
+              <a:rPr sz="1200" b="0" i="0">
+                <a:solidFill>
+                  <a:srgbClr val="707070"/>
+                </a:solidFill>
+                <a:latin typeface="Calibri"/>
+              </a:rPr>
+              <a:t>AI Use Declaration (HUF-STD-001 v1.1): research design, mathematical content, code, and scientific responsibility remain with the named author. AI assistants (Claude, ChatGPT, Grok) used for drafting, sweeps, and reviews. Author retains full responsibility.  Apache-2.0 code · CC BY 4.0 docs.</a:t>
+            </a:r>
+          </a:p>
+        </p:txBody>
+      </p:sp>
+      <p:sp>
+        <p:nvSpPr>
+          <p:cNvPr id="22" name="TextBox 21"/>
+          <p:cNvSpPr txBox="1"/>
+          <p:nvPr/>
+        </p:nvSpPr>
+        <p:spPr>
+          <a:xfrm>
+            <a:off x="8412480" y="7342631"/>
+            <a:ext cx="1188720" cy="329184"/>
+          </a:xfrm>
+          <a:prstGeom prst="rect">
+            <a:avLst/>
+          </a:prstGeom>
+          <a:noFill/>
+        </p:spPr>
+        <p:txBody>
+          <a:bodyPr wrap="square" lIns="60000" rIns="60000" tIns="30000" bIns="30000">
+            <a:spAutoFit/>
+          </a:bodyPr>
+          <a:lstStyle/>
+          <a:p>
+            <a:pPr algn="r"/>
+            <a:r>
+              <a:rPr sz="1500" b="1" i="0">
+                <a:solidFill>
+                  <a:srgbClr val="555555"/>
+                </a:solidFill>
+                <a:latin typeface="Calibri"/>
+              </a:rPr>
+              <a:t>21 / 21</a:t>
             </a:r>
           </a:p>
         </p:txBody>
@@ -6965,7 +7487,7 @@
                 </a:solidFill>
                 <a:latin typeface="Calibri"/>
               </a:rPr>
-              <a:t>3 / 19</a:t>
+              <a:t>3 / 21</a:t>
             </a:r>
           </a:p>
         </p:txBody>
@@ -7400,7 +7922,7 @@
                 </a:solidFill>
                 <a:latin typeface="Calibri"/>
               </a:rPr>
-              <a:t>4 / 19</a:t>
+              <a:t>4 / 21</a:t>
             </a:r>
           </a:p>
         </p:txBody>
@@ -8130,7 +8652,7 @@
                 </a:solidFill>
                 <a:latin typeface="Calibri"/>
               </a:rPr>
-              <a:t>5 / 19</a:t>
+              <a:t>5 / 21</a:t>
             </a:r>
           </a:p>
         </p:txBody>
@@ -8390,7 +8912,7 @@
                 </a:solidFill>
                 <a:latin typeface="Calibri"/>
               </a:rPr>
-              <a:t>6 / 19</a:t>
+              <a:t>6 / 21</a:t>
             </a:r>
           </a:p>
         </p:txBody>
@@ -8650,7 +9172,7 @@
                 </a:solidFill>
                 <a:latin typeface="Calibri"/>
               </a:rPr>
-              <a:t>7 / 19</a:t>
+              <a:t>7 / 21</a:t>
             </a:r>
           </a:p>
         </p:txBody>
@@ -8689,8 +9211,8 @@
         </p:nvSpPr>
         <p:spPr>
           <a:xfrm>
-            <a:off x="457200" y="292608"/>
-            <a:ext cx="9144000" cy="713232"/>
+            <a:off x="457200" y="274320"/>
+            <a:ext cx="9144000" cy="566928"/>
           </a:xfrm>
           <a:prstGeom prst="rect">
             <a:avLst/>
@@ -8705,13 +9227,13 @@
           <a:p>
             <a:pPr algn="ctr"/>
             <a:r>
-              <a:rPr sz="3000" b="1" i="0">
+              <a:rPr sz="2600" b="1" i="0">
                 <a:solidFill>
                   <a:srgbClr val="111111"/>
                 </a:solidFill>
                 <a:latin typeface="Calibri"/>
               </a:rPr>
-              <a:t>Japan — share and structural work</a:t>
+              <a:t>Germany — orthogonal projections (XY / XZ / YZ)</a:t>
             </a:r>
           </a:p>
         </p:txBody>
@@ -8724,8 +9246,8 @@
         </p:nvSpPr>
         <p:spPr>
           <a:xfrm>
-            <a:off x="457200" y="1024128"/>
-            <a:ext cx="9144000" cy="384048"/>
+            <a:off x="457200" y="950976"/>
+            <a:ext cx="9144000" cy="365760"/>
           </a:xfrm>
           <a:prstGeom prst="rect">
             <a:avLst/>
@@ -8740,20 +9262,20 @@
           <a:p>
             <a:pPr algn="ctr"/>
             <a:r>
-              <a:rPr sz="1500" b="0" i="1">
-                <a:solidFill>
-                  <a:srgbClr val="555555"/>
-                </a:solidFill>
-                <a:latin typeface="Calibri"/>
-              </a:rPr>
-              <a:t>Fukushima 2011: an external shock displaces nuclear; a multi-year reorganisation follows.</a:t>
+              <a:rPr sz="1500" b="1" i="1">
+                <a:solidFill>
+                  <a:srgbClr val="333333"/>
+                </a:solidFill>
+                <a:latin typeface="Calibri"/>
+              </a:rPr>
+              <a:t>Germany alone gets the complete plate set · the Section view: CLR plan, XZ bearings, and per-carrier CLR for a representative year.</a:t>
             </a:r>
           </a:p>
         </p:txBody>
       </p:sp>
       <p:pic>
         <p:nvPicPr>
-          <p:cNvPr id="4" name="Picture 3" descr="fig3_japan.png"/>
+          <p:cNvPr id="4" name="Picture 3" descr="image14.png"/>
           <p:cNvPicPr>
             <a:picLocks noChangeAspect="1"/>
           </p:cNvPicPr>
@@ -8767,8 +9289,8 @@
         </p:blipFill>
         <p:spPr>
           <a:xfrm>
-            <a:off x="640080" y="1371600"/>
-            <a:ext cx="8778240" cy="4727448"/>
+            <a:off x="1143000" y="1417320"/>
+            <a:ext cx="7772400" cy="4855464"/>
           </a:xfrm>
           <a:prstGeom prst="rect">
             <a:avLst/>
@@ -8778,76 +9300,6 @@
       <p:sp>
         <p:nvSpPr>
           <p:cNvPr id="5" name="TextBox 4"/>
-          <p:cNvSpPr txBox="1"/>
-          <p:nvPr/>
-        </p:nvSpPr>
-        <p:spPr>
-          <a:xfrm>
-            <a:off x="457200" y="6144768"/>
-            <a:ext cx="9144000" cy="365760"/>
-          </a:xfrm>
-          <a:prstGeom prst="rect">
-            <a:avLst/>
-          </a:prstGeom>
-          <a:noFill/>
-        </p:spPr>
-        <p:txBody>
-          <a:bodyPr wrap="square" lIns="60000" rIns="60000" tIns="30000" bIns="30000">
-            <a:spAutoFit/>
-          </a:bodyPr>
-          <a:lstStyle/>
-          <a:p>
-            <a:pPr algn="ctr"/>
-            <a:r>
-              <a:rPr sz="1600" b="1" i="0">
-                <a:solidFill>
-                  <a:srgbClr val="000000"/>
-                </a:solidFill>
-                <a:latin typeface="Calibri"/>
-              </a:rPr>
-              <a:t>Aitchison distance (distance on the simplex) 2011 → 2012 ≈ 3 × the baseline step  ·  17 Helmsman flips</a:t>
-            </a:r>
-          </a:p>
-        </p:txBody>
-      </p:sp>
-      <p:sp>
-        <p:nvSpPr>
-          <p:cNvPr id="6" name="TextBox 5"/>
-          <p:cNvSpPr txBox="1"/>
-          <p:nvPr/>
-        </p:nvSpPr>
-        <p:spPr>
-          <a:xfrm>
-            <a:off x="457200" y="6565392"/>
-            <a:ext cx="9144000" cy="365760"/>
-          </a:xfrm>
-          <a:prstGeom prst="rect">
-            <a:avLst/>
-          </a:prstGeom>
-          <a:noFill/>
-        </p:spPr>
-        <p:txBody>
-          <a:bodyPr wrap="square" lIns="60000" rIns="60000" tIns="30000" bIns="30000">
-            <a:spAutoFit/>
-          </a:bodyPr>
-          <a:lstStyle/>
-          <a:p>
-            <a:pPr algn="ctr"/>
-            <a:r>
-              <a:rPr sz="1400" b="0" i="1">
-                <a:solidFill>
-                  <a:srgbClr val="707070"/>
-                </a:solidFill>
-                <a:latin typeface="Calibri"/>
-              </a:rPr>
-              <a:t>The instrument detects both the shock and the multi-year reorganisation that followed.</a:t>
-            </a:r>
-          </a:p>
-        </p:txBody>
-      </p:sp>
-      <p:sp>
-        <p:nvSpPr>
-          <p:cNvPr id="7" name="TextBox 6"/>
           <p:cNvSpPr txBox="1"/>
           <p:nvPr/>
         </p:nvSpPr>
@@ -8875,14 +9327,14 @@
                 </a:solidFill>
                 <a:latin typeface="Calibri"/>
               </a:rPr>
-              <a:t>Japan — share + structural work  ·  the trajectory is next</a:t>
-            </a:r>
-          </a:p>
-        </p:txBody>
-      </p:sp>
-      <p:sp>
-        <p:nvSpPr>
-          <p:cNvPr id="8" name="TextBox 7"/>
+              <a:t>Germany · complete plate set (orthogonal projections)</a:t>
+            </a:r>
+          </a:p>
+        </p:txBody>
+      </p:sp>
+      <p:sp>
+        <p:nvSpPr>
+          <p:cNvPr id="6" name="TextBox 5"/>
           <p:cNvSpPr txBox="1"/>
           <p:nvPr/>
         </p:nvSpPr>
@@ -8910,7 +9362,7 @@
                 </a:solidFill>
                 <a:latin typeface="Calibri"/>
               </a:rPr>
-              <a:t>8 / 19</a:t>
+              <a:t>8 / 21</a:t>
             </a:r>
           </a:p>
         </p:txBody>
@@ -8949,8 +9401,8 @@
         </p:nvSpPr>
         <p:spPr>
           <a:xfrm>
-            <a:off x="457200" y="292608"/>
-            <a:ext cx="9144000" cy="713232"/>
+            <a:off x="457200" y="274320"/>
+            <a:ext cx="9144000" cy="566928"/>
           </a:xfrm>
           <a:prstGeom prst="rect">
             <a:avLst/>
@@ -8965,13 +9417,13 @@
           <a:p>
             <a:pPr algn="ctr"/>
             <a:r>
-              <a:rPr sz="3000" b="1" i="0">
+              <a:rPr sz="2600" b="1" i="0">
                 <a:solidFill>
                   <a:srgbClr val="111111"/>
                 </a:solidFill>
                 <a:latin typeface="Calibri"/>
               </a:rPr>
-              <a:t>Japan — the trajectory</a:t>
+              <a:t>Germany — ILR-Helmert triplet</a:t>
             </a:r>
           </a:p>
         </p:txBody>
@@ -8984,8 +9436,8 @@
         </p:nvSpPr>
         <p:spPr>
           <a:xfrm>
-            <a:off x="457200" y="1024128"/>
-            <a:ext cx="9144000" cy="384048"/>
+            <a:off x="457200" y="950976"/>
+            <a:ext cx="9144000" cy="365760"/>
           </a:xfrm>
           <a:prstGeom prst="rect">
             <a:avLst/>
@@ -9000,20 +9452,20 @@
           <a:p>
             <a:pPr algn="ctr"/>
             <a:r>
-              <a:rPr sz="1500" b="0" i="1">
-                <a:solidFill>
-                  <a:srgbClr val="555555"/>
-                </a:solidFill>
-                <a:latin typeface="Calibri"/>
-              </a:rPr>
-              <a:t>The Helmsman trajectory: looping reorganisation, not a single step.</a:t>
+              <a:rPr sz="1500" b="1" i="1">
+                <a:solidFill>
+                  <a:srgbClr val="333333"/>
+                </a:solidFill>
+                <a:latin typeface="Calibri"/>
+              </a:rPr>
+              <a:t>Germany's complete set · three orthonormal ILR projections of the 2000–2025 trajectory (ilr1×ilr2 · ilr1×ilr3 · ilr2×ilr3).</a:t>
             </a:r>
           </a:p>
         </p:txBody>
       </p:sp>
       <p:pic>
         <p:nvPicPr>
-          <p:cNvPr id="4" name="Picture 3" descr="fig6_nav_jpn.png"/>
+          <p:cNvPr id="4" name="Picture 3" descr="image17.png"/>
           <p:cNvPicPr>
             <a:picLocks noChangeAspect="1"/>
           </p:cNvPicPr>
@@ -9027,8 +9479,8 @@
         </p:blipFill>
         <p:spPr>
           <a:xfrm>
-            <a:off x="1828800" y="1325880"/>
-            <a:ext cx="6400800" cy="4946904"/>
+            <a:off x="1143000" y="1417320"/>
+            <a:ext cx="7772400" cy="4855464"/>
           </a:xfrm>
           <a:prstGeom prst="rect">
             <a:avLst/>
@@ -9038,76 +9490,6 @@
       <p:sp>
         <p:nvSpPr>
           <p:cNvPr id="5" name="TextBox 4"/>
-          <p:cNvSpPr txBox="1"/>
-          <p:nvPr/>
-        </p:nvSpPr>
-        <p:spPr>
-          <a:xfrm>
-            <a:off x="457200" y="6327648"/>
-            <a:ext cx="9144000" cy="365760"/>
-          </a:xfrm>
-          <a:prstGeom prst="rect">
-            <a:avLst/>
-          </a:prstGeom>
-          <a:noFill/>
-        </p:spPr>
-        <p:txBody>
-          <a:bodyPr wrap="square" lIns="60000" rIns="60000" tIns="30000" bIns="30000">
-            <a:spAutoFit/>
-          </a:bodyPr>
-          <a:lstStyle/>
-          <a:p>
-            <a:pPr algn="ctr"/>
-            <a:r>
-              <a:rPr sz="1700" b="1" i="0">
-                <a:solidFill>
-                  <a:srgbClr val="000000"/>
-                </a:solidFill>
-                <a:latin typeface="Calibri"/>
-              </a:rPr>
-              <a:t>Trajectory directness 0.09 — the loop-and-reorganise pattern.</a:t>
-            </a:r>
-          </a:p>
-        </p:txBody>
-      </p:sp>
-      <p:sp>
-        <p:nvSpPr>
-          <p:cNvPr id="6" name="TextBox 5"/>
-          <p:cNvSpPr txBox="1"/>
-          <p:nvPr/>
-        </p:nvSpPr>
-        <p:spPr>
-          <a:xfrm>
-            <a:off x="457200" y="6748272"/>
-            <a:ext cx="9144000" cy="365760"/>
-          </a:xfrm>
-          <a:prstGeom prst="rect">
-            <a:avLst/>
-          </a:prstGeom>
-          <a:noFill/>
-        </p:spPr>
-        <p:txBody>
-          <a:bodyPr wrap="square" lIns="60000" rIns="60000" tIns="30000" bIns="30000">
-            <a:spAutoFit/>
-          </a:bodyPr>
-          <a:lstStyle/>
-          <a:p>
-            <a:pPr algn="ctr"/>
-            <a:r>
-              <a:rPr sz="1400" b="0" i="1">
-                <a:solidFill>
-                  <a:srgbClr val="707070"/>
-                </a:solidFill>
-                <a:latin typeface="Calibri"/>
-              </a:rPr>
-              <a:t>The trajectory revisits and reroutes — the system searches for a new composition, not a planned trajectory.</a:t>
-            </a:r>
-          </a:p>
-        </p:txBody>
-      </p:sp>
-      <p:sp>
-        <p:nvSpPr>
-          <p:cNvPr id="7" name="TextBox 6"/>
           <p:cNvSpPr txBox="1"/>
           <p:nvPr/>
         </p:nvSpPr>
@@ -9135,14 +9517,14 @@
                 </a:solidFill>
                 <a:latin typeface="Calibri"/>
               </a:rPr>
-              <a:t>Japan — the trajectory</a:t>
-            </a:r>
-          </a:p>
-        </p:txBody>
-      </p:sp>
-      <p:sp>
-        <p:nvSpPr>
-          <p:cNvPr id="8" name="TextBox 7"/>
+              <a:t>Germany · complete plate set (ILR-Helmert triplet)</a:t>
+            </a:r>
+          </a:p>
+        </p:txBody>
+      </p:sp>
+      <p:sp>
+        <p:nvSpPr>
+          <p:cNvPr id="6" name="TextBox 5"/>
           <p:cNvSpPr txBox="1"/>
           <p:nvPr/>
         </p:nvSpPr>
@@ -9170,7 +9552,7 @@
                 </a:solidFill>
                 <a:latin typeface="Calibri"/>
               </a:rPr>
-              <a:t>9 / 19</a:t>
+              <a:t>9 / 21</a:t>
             </a:r>
           </a:p>
         </p:txBody>
